--- a/이수혁/22일차/AGV 픽업 파이프라인.pptx
+++ b/이수혁/22일차/AGV 픽업 파이프라인.pptx
@@ -8,7 +8,7 @@
     <p:notesMasterId r:id="rId3"/>
   </p:notesMasterIdLst>
   <p:sldIdLst>
-    <p:sldId id="258" r:id="rId2"/>
+    <p:sldId id="256" r:id="rId2"/>
   </p:sldIdLst>
   <p:sldSz cx="12192000" cy="6858000"/>
   <p:notesSz cx="6858000" cy="9144000"/>
@@ -798,11 +798,6 @@
         </p:spPr>
       </p:sp>
     </p:spTree>
-    <p:extLst>
-      <p:ext uri="{BB962C8B-B14F-4D97-AF65-F5344CB8AC3E}">
-        <p14:creationId xmlns:p14="http://schemas.microsoft.com/office/powerpoint/2010/main" val="3377133448"/>
-      </p:ext>
-    </p:extLst>
   </p:cSld>
   <p:clrMapOvr>
     <a:masterClrMapping/>
@@ -10636,6 +10631,14 @@
 <file path=ppt/slides/slide1.xml><?xml version="1.0" encoding="utf-8"?>
 <p:sld xmlns:a="http://schemas.openxmlformats.org/drawingml/2006/main" xmlns:r="http://schemas.openxmlformats.org/officeDocument/2006/relationships" xmlns:p="http://schemas.openxmlformats.org/presentationml/2006/main">
   <p:cSld>
+    <p:bg>
+      <p:bgPr>
+        <a:solidFill>
+          <a:srgbClr val="0A0F1E"/>
+        </a:solidFill>
+        <a:effectLst/>
+      </p:bgPr>
+    </p:bg>
     <p:spTree>
       <p:nvGrpSpPr>
         <p:cNvPr id="1" name="Shape 83"/>
@@ -10692,8 +10695,8 @@
         </p:blipFill>
         <p:spPr>
           <a:xfrm>
-            <a:off x="571500" y="1476376"/>
-            <a:ext cx="3492549" cy="5381624"/>
+            <a:off x="6953250" y="762000"/>
+            <a:ext cx="4762500" cy="3810000"/>
           </a:xfrm>
           <a:prstGeom prst="rect">
             <a:avLst/>
@@ -10719,8 +10722,8 @@
         </p:blipFill>
         <p:spPr>
           <a:xfrm>
-            <a:off x="4349800" y="1476376"/>
-            <a:ext cx="3492549" cy="5381624"/>
+            <a:off x="476250" y="6371627"/>
+            <a:ext cx="11239500" cy="369094"/>
           </a:xfrm>
           <a:prstGeom prst="rect">
             <a:avLst/>
@@ -10746,8 +10749,8 @@
         </p:blipFill>
         <p:spPr>
           <a:xfrm>
-            <a:off x="8128100" y="1476376"/>
-            <a:ext cx="3492549" cy="5381624"/>
+            <a:off x="504839" y="1621416"/>
+            <a:ext cx="3619500" cy="4697610"/>
           </a:xfrm>
           <a:prstGeom prst="rect">
             <a:avLst/>
@@ -10773,8 +10776,8 @@
         </p:blipFill>
         <p:spPr>
           <a:xfrm>
-            <a:off x="2959001" y="1866901"/>
-            <a:ext cx="762148" cy="233355"/>
+            <a:off x="4310562" y="1550193"/>
+            <a:ext cx="7429500" cy="4697610"/>
           </a:xfrm>
           <a:prstGeom prst="rect">
             <a:avLst/>
@@ -10800,8 +10803,413 @@
         </p:blipFill>
         <p:spPr>
           <a:xfrm>
-            <a:off x="6737301" y="1866901"/>
-            <a:ext cx="762148" cy="233355"/>
+            <a:off x="510087" y="1559718"/>
+            <a:ext cx="3600450" cy="552450"/>
+          </a:xfrm>
+          <a:prstGeom prst="rect">
+            <a:avLst/>
+          </a:prstGeom>
+          <a:noFill/>
+          <a:ln>
+            <a:noFill/>
+          </a:ln>
+        </p:spPr>
+      </p:pic>
+      <p:pic>
+        <p:nvPicPr>
+          <p:cNvPr id="90" name="Google Shape;90;p13" descr="image.png"/>
+          <p:cNvPicPr preferRelativeResize="0"/>
+          <p:nvPr/>
+        </p:nvPicPr>
+        <p:blipFill rotWithShape="1">
+          <a:blip r:embed="rId9">
+            <a:alphaModFix/>
+          </a:blip>
+          <a:srcRect/>
+          <a:stretch/>
+        </p:blipFill>
+        <p:spPr>
+          <a:xfrm>
+            <a:off x="4320087" y="1559718"/>
+            <a:ext cx="7410450" cy="552450"/>
+          </a:xfrm>
+          <a:prstGeom prst="rect">
+            <a:avLst/>
+          </a:prstGeom>
+          <a:noFill/>
+          <a:ln>
+            <a:noFill/>
+          </a:ln>
+        </p:spPr>
+      </p:pic>
+      <p:pic>
+        <p:nvPicPr>
+          <p:cNvPr id="91" name="Google Shape;91;p13" descr="image.png"/>
+          <p:cNvPicPr preferRelativeResize="0"/>
+          <p:nvPr/>
+        </p:nvPicPr>
+        <p:blipFill rotWithShape="1">
+          <a:blip r:embed="rId10">
+            <a:alphaModFix/>
+          </a:blip>
+          <a:srcRect/>
+          <a:stretch/>
+        </p:blipFill>
+        <p:spPr>
+          <a:xfrm>
+            <a:off x="700587" y="2255043"/>
+            <a:ext cx="762000" cy="523875"/>
+          </a:xfrm>
+          <a:prstGeom prst="rect">
+            <a:avLst/>
+          </a:prstGeom>
+          <a:noFill/>
+          <a:ln>
+            <a:noFill/>
+          </a:ln>
+        </p:spPr>
+      </p:pic>
+      <p:pic>
+        <p:nvPicPr>
+          <p:cNvPr id="92" name="Google Shape;92;p13" descr="image.png"/>
+          <p:cNvPicPr preferRelativeResize="0"/>
+          <p:nvPr/>
+        </p:nvPicPr>
+        <p:blipFill rotWithShape="1">
+          <a:blip r:embed="rId11">
+            <a:alphaModFix/>
+          </a:blip>
+          <a:srcRect/>
+          <a:stretch/>
+        </p:blipFill>
+        <p:spPr>
+          <a:xfrm>
+            <a:off x="700587" y="3360539"/>
+            <a:ext cx="762000" cy="523875"/>
+          </a:xfrm>
+          <a:prstGeom prst="rect">
+            <a:avLst/>
+          </a:prstGeom>
+          <a:noFill/>
+          <a:ln>
+            <a:noFill/>
+          </a:ln>
+        </p:spPr>
+      </p:pic>
+      <p:pic>
+        <p:nvPicPr>
+          <p:cNvPr id="93" name="Google Shape;93;p13" descr="image.png"/>
+          <p:cNvPicPr preferRelativeResize="0"/>
+          <p:nvPr/>
+        </p:nvPicPr>
+        <p:blipFill rotWithShape="1">
+          <a:blip r:embed="rId12">
+            <a:alphaModFix/>
+          </a:blip>
+          <a:srcRect/>
+          <a:stretch/>
+        </p:blipFill>
+        <p:spPr>
+          <a:xfrm>
+            <a:off x="700587" y="4466034"/>
+            <a:ext cx="762000" cy="523875"/>
+          </a:xfrm>
+          <a:prstGeom prst="rect">
+            <a:avLst/>
+          </a:prstGeom>
+          <a:noFill/>
+          <a:ln>
+            <a:noFill/>
+          </a:ln>
+        </p:spPr>
+      </p:pic>
+      <p:pic>
+        <p:nvPicPr>
+          <p:cNvPr id="94" name="Google Shape;94;p13" descr="image.png"/>
+          <p:cNvPicPr preferRelativeResize="0"/>
+          <p:nvPr/>
+        </p:nvPicPr>
+        <p:blipFill rotWithShape="1">
+          <a:blip r:embed="rId10">
+            <a:alphaModFix/>
+          </a:blip>
+          <a:srcRect/>
+          <a:stretch/>
+        </p:blipFill>
+        <p:spPr>
+          <a:xfrm>
+            <a:off x="700587" y="5571529"/>
+            <a:ext cx="762000" cy="523875"/>
+          </a:xfrm>
+          <a:prstGeom prst="rect">
+            <a:avLst/>
+          </a:prstGeom>
+          <a:noFill/>
+          <a:ln>
+            <a:noFill/>
+          </a:ln>
+        </p:spPr>
+      </p:pic>
+      <p:pic>
+        <p:nvPicPr>
+          <p:cNvPr id="95" name="Google Shape;95;p13" descr="image.png"/>
+          <p:cNvPicPr preferRelativeResize="0"/>
+          <p:nvPr/>
+        </p:nvPicPr>
+        <p:blipFill rotWithShape="1">
+          <a:blip r:embed="rId13">
+            <a:alphaModFix/>
+          </a:blip>
+          <a:srcRect/>
+          <a:stretch/>
+        </p:blipFill>
+        <p:spPr>
+          <a:xfrm>
+            <a:off x="4510735" y="2255043"/>
+            <a:ext cx="2266801" cy="1863030"/>
+          </a:xfrm>
+          <a:prstGeom prst="rect">
+            <a:avLst/>
+          </a:prstGeom>
+          <a:noFill/>
+          <a:ln>
+            <a:noFill/>
+          </a:ln>
+        </p:spPr>
+      </p:pic>
+      <p:pic>
+        <p:nvPicPr>
+          <p:cNvPr id="96" name="Google Shape;96;p13" descr="image.png"/>
+          <p:cNvPicPr preferRelativeResize="0"/>
+          <p:nvPr/>
+        </p:nvPicPr>
+        <p:blipFill rotWithShape="1">
+          <a:blip r:embed="rId14">
+            <a:alphaModFix/>
+          </a:blip>
+          <a:srcRect/>
+          <a:stretch/>
+        </p:blipFill>
+        <p:spPr>
+          <a:xfrm>
+            <a:off x="6891837" y="2255043"/>
+            <a:ext cx="2266801" cy="1863030"/>
+          </a:xfrm>
+          <a:prstGeom prst="rect">
+            <a:avLst/>
+          </a:prstGeom>
+          <a:noFill/>
+          <a:ln>
+            <a:noFill/>
+          </a:ln>
+        </p:spPr>
+      </p:pic>
+      <p:pic>
+        <p:nvPicPr>
+          <p:cNvPr id="97" name="Google Shape;97;p13" descr="image.png"/>
+          <p:cNvPicPr preferRelativeResize="0"/>
+          <p:nvPr/>
+        </p:nvPicPr>
+        <p:blipFill rotWithShape="1">
+          <a:blip r:embed="rId13">
+            <a:alphaModFix/>
+          </a:blip>
+          <a:srcRect/>
+          <a:stretch/>
+        </p:blipFill>
+        <p:spPr>
+          <a:xfrm>
+            <a:off x="9272938" y="2255043"/>
+            <a:ext cx="2266801" cy="1863030"/>
+          </a:xfrm>
+          <a:prstGeom prst="rect">
+            <a:avLst/>
+          </a:prstGeom>
+          <a:noFill/>
+          <a:ln>
+            <a:noFill/>
+          </a:ln>
+        </p:spPr>
+      </p:pic>
+      <p:pic>
+        <p:nvPicPr>
+          <p:cNvPr id="98" name="Google Shape;98;p13" descr="image.png"/>
+          <p:cNvPicPr preferRelativeResize="0"/>
+          <p:nvPr/>
+        </p:nvPicPr>
+        <p:blipFill rotWithShape="1">
+          <a:blip r:embed="rId15">
+            <a:alphaModFix/>
+          </a:blip>
+          <a:srcRect/>
+          <a:stretch/>
+        </p:blipFill>
+        <p:spPr>
+          <a:xfrm>
+            <a:off x="5701360" y="4232374"/>
+            <a:ext cx="2266801" cy="1863030"/>
+          </a:xfrm>
+          <a:prstGeom prst="rect">
+            <a:avLst/>
+          </a:prstGeom>
+          <a:noFill/>
+          <a:ln>
+            <a:noFill/>
+          </a:ln>
+        </p:spPr>
+      </p:pic>
+      <p:pic>
+        <p:nvPicPr>
+          <p:cNvPr id="99" name="Google Shape;99;p13" descr="image.png"/>
+          <p:cNvPicPr preferRelativeResize="0"/>
+          <p:nvPr/>
+        </p:nvPicPr>
+        <p:blipFill rotWithShape="1">
+          <a:blip r:embed="rId16">
+            <a:alphaModFix/>
+          </a:blip>
+          <a:srcRect/>
+          <a:stretch/>
+        </p:blipFill>
+        <p:spPr>
+          <a:xfrm>
+            <a:off x="8082462" y="4232374"/>
+            <a:ext cx="2266801" cy="1863030"/>
+          </a:xfrm>
+          <a:prstGeom prst="rect">
+            <a:avLst/>
+          </a:prstGeom>
+          <a:noFill/>
+          <a:ln>
+            <a:noFill/>
+          </a:ln>
+        </p:spPr>
+      </p:pic>
+      <p:pic>
+        <p:nvPicPr>
+          <p:cNvPr id="100" name="Google Shape;100;p13" descr="image.png"/>
+          <p:cNvPicPr preferRelativeResize="0"/>
+          <p:nvPr/>
+        </p:nvPicPr>
+        <p:blipFill rotWithShape="1">
+          <a:blip r:embed="rId17">
+            <a:alphaModFix/>
+          </a:blip>
+          <a:srcRect/>
+          <a:stretch/>
+        </p:blipFill>
+        <p:spPr>
+          <a:xfrm>
+            <a:off x="4634560" y="2378868"/>
+            <a:ext cx="2019151" cy="762000"/>
+          </a:xfrm>
+          <a:prstGeom prst="rect">
+            <a:avLst/>
+          </a:prstGeom>
+          <a:noFill/>
+          <a:ln>
+            <a:noFill/>
+          </a:ln>
+        </p:spPr>
+      </p:pic>
+      <p:pic>
+        <p:nvPicPr>
+          <p:cNvPr id="101" name="Google Shape;101;p13" descr="image.png"/>
+          <p:cNvPicPr preferRelativeResize="0"/>
+          <p:nvPr/>
+        </p:nvPicPr>
+        <p:blipFill rotWithShape="1">
+          <a:blip r:embed="rId18">
+            <a:alphaModFix/>
+          </a:blip>
+          <a:srcRect/>
+          <a:stretch/>
+        </p:blipFill>
+        <p:spPr>
+          <a:xfrm>
+            <a:off x="7015662" y="2378868"/>
+            <a:ext cx="2019151" cy="762000"/>
+          </a:xfrm>
+          <a:prstGeom prst="rect">
+            <a:avLst/>
+          </a:prstGeom>
+          <a:noFill/>
+          <a:ln>
+            <a:noFill/>
+          </a:ln>
+        </p:spPr>
+      </p:pic>
+      <p:pic>
+        <p:nvPicPr>
+          <p:cNvPr id="102" name="Google Shape;102;p13" descr="image.png"/>
+          <p:cNvPicPr preferRelativeResize="0"/>
+          <p:nvPr/>
+        </p:nvPicPr>
+        <p:blipFill rotWithShape="1">
+          <a:blip r:embed="rId17">
+            <a:alphaModFix/>
+          </a:blip>
+          <a:srcRect/>
+          <a:stretch/>
+        </p:blipFill>
+        <p:spPr>
+          <a:xfrm>
+            <a:off x="9396763" y="2378868"/>
+            <a:ext cx="2019151" cy="762000"/>
+          </a:xfrm>
+          <a:prstGeom prst="rect">
+            <a:avLst/>
+          </a:prstGeom>
+          <a:noFill/>
+          <a:ln>
+            <a:noFill/>
+          </a:ln>
+        </p:spPr>
+      </p:pic>
+      <p:pic>
+        <p:nvPicPr>
+          <p:cNvPr id="103" name="Google Shape;103;p13" descr="image.png"/>
+          <p:cNvPicPr preferRelativeResize="0"/>
+          <p:nvPr/>
+        </p:nvPicPr>
+        <p:blipFill rotWithShape="1">
+          <a:blip r:embed="rId19">
+            <a:alphaModFix/>
+          </a:blip>
+          <a:srcRect/>
+          <a:stretch/>
+        </p:blipFill>
+        <p:spPr>
+          <a:xfrm>
+            <a:off x="5825185" y="4356199"/>
+            <a:ext cx="2019151" cy="762000"/>
+          </a:xfrm>
+          <a:prstGeom prst="rect">
+            <a:avLst/>
+          </a:prstGeom>
+          <a:noFill/>
+          <a:ln>
+            <a:noFill/>
+          </a:ln>
+        </p:spPr>
+      </p:pic>
+      <p:pic>
+        <p:nvPicPr>
+          <p:cNvPr id="104" name="Google Shape;104;p13" descr="image.png"/>
+          <p:cNvPicPr preferRelativeResize="0"/>
+          <p:nvPr/>
+        </p:nvPicPr>
+        <p:blipFill rotWithShape="1">
+          <a:blip r:embed="rId20">
+            <a:alphaModFix/>
+          </a:blip>
+          <a:srcRect/>
+          <a:stretch/>
+        </p:blipFill>
+        <p:spPr>
+          <a:xfrm>
+            <a:off x="8206287" y="4356199"/>
+            <a:ext cx="2019151" cy="762000"/>
           </a:xfrm>
           <a:prstGeom prst="rect">
             <a:avLst/>
@@ -10814,14 +11222,14 @@
       </p:pic>
       <p:sp>
         <p:nvSpPr>
-          <p:cNvPr id="90" name="Google Shape;90;p13"/>
+          <p:cNvPr id="105" name="Google Shape;105;p13"/>
           <p:cNvSpPr txBox="1"/>
           <p:nvPr/>
         </p:nvSpPr>
         <p:spPr>
           <a:xfrm>
-            <a:off x="571500" y="571501"/>
-            <a:ext cx="11601451" cy="461665"/>
+            <a:off x="476250" y="390525"/>
+            <a:ext cx="1840259" cy="171450"/>
           </a:xfrm>
           <a:prstGeom prst="rect">
             <a:avLst/>
@@ -10837,28 +11245,41 @@
           </a:bodyPr>
           <a:lstStyle/>
           <a:p>
+            <a:pPr marL="0" marR="0" lvl="0" indent="0" algn="l" rtl="0">
+              <a:spcBef>
+                <a:spcPts val="0"/>
+              </a:spcBef>
+              <a:spcAft>
+                <a:spcPts val="0"/>
+              </a:spcAft>
+              <a:buNone/>
+            </a:pPr>
             <a:r>
-              <a:rPr lang="en-US" sz="3000" b="1">
+              <a:rPr lang="en-US" sz="975" b="1" i="0" u="none" strike="noStrike" cap="none">
                 <a:solidFill>
-                  <a:srgbClr val="FFFFFF"/>
+                  <a:srgbClr val="00C8FF"/>
                 </a:solidFill>
+                <a:latin typeface="Malgun Gothic"/>
+                <a:ea typeface="Malgun Gothic"/>
+                <a:cs typeface="Malgun Gothic"/>
+                <a:sym typeface="Malgun Gothic"/>
               </a:rPr>
-              <a:t>AGV 픽업 파이프라인: 비전/라이다 퓨전 도킹</a:t>
+              <a:t>02 핵심 알고리즘 · SLIDE 1/1</a:t>
             </a:r>
-            <a:endParaRPr sz="1800"/>
+            <a:endParaRPr/>
           </a:p>
         </p:txBody>
       </p:sp>
       <p:sp>
         <p:nvSpPr>
-          <p:cNvPr id="91" name="Google Shape;91;p13"/>
+          <p:cNvPr id="106" name="Google Shape;106;p13"/>
           <p:cNvSpPr txBox="1"/>
           <p:nvPr/>
         </p:nvSpPr>
         <p:spPr>
           <a:xfrm>
-            <a:off x="914400" y="2581276"/>
-            <a:ext cx="2586573" cy="300210"/>
+            <a:off x="476250" y="638175"/>
+            <a:ext cx="11715750" cy="419100"/>
           </a:xfrm>
           <a:prstGeom prst="rect">
             <a:avLst/>
@@ -10874,28 +11295,41 @@
           </a:bodyPr>
           <a:lstStyle/>
           <a:p>
+            <a:pPr marL="0" marR="0" lvl="0" indent="0" algn="l" rtl="0">
+              <a:spcBef>
+                <a:spcPts val="0"/>
+              </a:spcBef>
+              <a:spcAft>
+                <a:spcPts val="0"/>
+              </a:spcAft>
+              <a:buNone/>
+            </a:pPr>
             <a:r>
-              <a:rPr lang="en-US" sz="1951" b="1">
+              <a:rPr lang="en-US" sz="2400" b="1" i="0" u="none" strike="noStrike" cap="none">
                 <a:solidFill>
                   <a:srgbClr val="FFFFFF"/>
                 </a:solidFill>
+                <a:latin typeface="Malgun Gothic"/>
+                <a:ea typeface="Malgun Gothic"/>
+                <a:cs typeface="Malgun Gothic"/>
+                <a:sym typeface="Malgun Gothic"/>
               </a:rPr>
-              <a:t>Phase 1: 유도 및 추종</a:t>
+              <a:t>AGV 픽업 파이프라인: 비전/라이다 퓨전 및 다단계 정밀 도킹</a:t>
             </a:r>
-            <a:endParaRPr sz="1800"/>
+            <a:endParaRPr/>
           </a:p>
         </p:txBody>
       </p:sp>
       <p:sp>
         <p:nvSpPr>
-          <p:cNvPr id="92" name="Google Shape;92;p13"/>
+          <p:cNvPr id="107" name="Google Shape;107;p13"/>
           <p:cNvSpPr txBox="1"/>
           <p:nvPr/>
         </p:nvSpPr>
         <p:spPr>
           <a:xfrm>
-            <a:off x="4692699" y="2581276"/>
-            <a:ext cx="2254344" cy="300210"/>
+            <a:off x="476250" y="1133475"/>
+            <a:ext cx="11239500" cy="207168"/>
           </a:xfrm>
           <a:prstGeom prst="rect">
             <a:avLst/>
@@ -10911,28 +11345,167 @@
           </a:bodyPr>
           <a:lstStyle/>
           <a:p>
+            <a:pPr marL="0" marR="0" lvl="0" indent="0" algn="l" rtl="0">
+              <a:lnSpc>
+                <a:spcPct val="150046"/>
+              </a:lnSpc>
+              <a:spcBef>
+                <a:spcPts val="0"/>
+              </a:spcBef>
+              <a:spcAft>
+                <a:spcPts val="0"/>
+              </a:spcAft>
+              <a:buNone/>
+            </a:pPr>
             <a:r>
-              <a:rPr lang="en-US" sz="1951" b="1">
+              <a:rPr lang="en-US" sz="1087" b="0" i="0" u="none" strike="noStrike" cap="none">
                 <a:solidFill>
-                  <a:srgbClr val="FFFFFF"/>
+                  <a:srgbClr val="94A3B8"/>
                 </a:solidFill>
+                <a:latin typeface="Malgun Gothic"/>
+                <a:ea typeface="Malgun Gothic"/>
+                <a:cs typeface="Malgun Gothic"/>
+                <a:sym typeface="Malgun Gothic"/>
               </a:rPr>
-              <a:t>Phase 2: 정밀 도킹</a:t>
+              <a:t>시스템 과부하를 방지하고 물리적 관성을 제어하기 위한 철저한 상태 머신(FSM) 기반의 2단계 픽업 알고리즘</a:t>
             </a:r>
-            <a:endParaRPr sz="1800"/>
+            <a:endParaRPr/>
           </a:p>
         </p:txBody>
       </p:sp>
       <p:sp>
         <p:nvSpPr>
-          <p:cNvPr id="93" name="Google Shape;93;p13"/>
+          <p:cNvPr id="108" name="Google Shape;108;p13"/>
+          <p:cNvSpPr/>
+          <p:nvPr/>
+        </p:nvSpPr>
+        <p:spPr>
+          <a:xfrm>
+            <a:off x="504839" y="1555388"/>
+            <a:ext cx="3600450" cy="47625"/>
+          </a:xfrm>
+          <a:prstGeom prst="rect">
+            <a:avLst/>
+          </a:prstGeom>
+          <a:solidFill>
+            <a:srgbClr val="00C8FF"/>
+          </a:solidFill>
+          <a:ln>
+            <a:noFill/>
+          </a:ln>
+        </p:spPr>
+        <p:txBody>
+          <a:bodyPr spcFirstLastPara="1" wrap="square" lIns="91425" tIns="45700" rIns="91425" bIns="45700" anchor="ctr" anchorCtr="0">
+            <a:noAutofit/>
+          </a:bodyPr>
+          <a:lstStyle/>
+          <a:p>
+            <a:pPr marL="0" marR="0" lvl="0" indent="0" algn="ctr" rtl="0">
+              <a:spcBef>
+                <a:spcPts val="0"/>
+              </a:spcBef>
+              <a:spcAft>
+                <a:spcPts val="0"/>
+              </a:spcAft>
+              <a:buNone/>
+            </a:pPr>
+            <a:endParaRPr sz="1800" b="0" i="0" u="none" strike="noStrike" cap="none">
+              <a:solidFill>
+                <a:schemeClr val="dk1"/>
+              </a:solidFill>
+              <a:latin typeface="Calibri"/>
+              <a:ea typeface="Calibri"/>
+              <a:cs typeface="Calibri"/>
+              <a:sym typeface="Calibri"/>
+            </a:endParaRPr>
+          </a:p>
+        </p:txBody>
+      </p:sp>
+      <p:sp>
+        <p:nvSpPr>
+          <p:cNvPr id="109" name="Google Shape;109;p13"/>
+          <p:cNvSpPr/>
+          <p:nvPr/>
+        </p:nvSpPr>
+        <p:spPr>
+          <a:xfrm>
+            <a:off x="4329612" y="1566117"/>
+            <a:ext cx="7410450" cy="47625"/>
+          </a:xfrm>
+          <a:prstGeom prst="rect">
+            <a:avLst/>
+          </a:prstGeom>
+          <a:solidFill>
+            <a:srgbClr val="00FF88"/>
+          </a:solidFill>
+          <a:ln>
+            <a:noFill/>
+          </a:ln>
+        </p:spPr>
+        <p:txBody>
+          <a:bodyPr spcFirstLastPara="1" wrap="square" lIns="91425" tIns="45700" rIns="91425" bIns="45700" anchor="ctr" anchorCtr="0">
+            <a:noAutofit/>
+          </a:bodyPr>
+          <a:lstStyle/>
+          <a:p>
+            <a:pPr marL="0" marR="0" lvl="0" indent="0" algn="ctr" rtl="0">
+              <a:spcBef>
+                <a:spcPts val="0"/>
+              </a:spcBef>
+              <a:spcAft>
+                <a:spcPts val="0"/>
+              </a:spcAft>
+              <a:buNone/>
+            </a:pPr>
+            <a:endParaRPr sz="1800" b="0" i="0" u="none" strike="noStrike" cap="none">
+              <a:solidFill>
+                <a:schemeClr val="dk1"/>
+              </a:solidFill>
+              <a:latin typeface="Calibri"/>
+              <a:ea typeface="Calibri"/>
+              <a:cs typeface="Calibri"/>
+              <a:sym typeface="Calibri"/>
+            </a:endParaRPr>
+          </a:p>
+        </p:txBody>
+      </p:sp>
+      <p:pic>
+        <p:nvPicPr>
+          <p:cNvPr id="110" name="Google Shape;110;p13" descr="image.png"/>
+          <p:cNvPicPr preferRelativeResize="0"/>
+          <p:nvPr/>
+        </p:nvPicPr>
+        <p:blipFill rotWithShape="1">
+          <a:blip r:embed="rId21">
+            <a:alphaModFix/>
+          </a:blip>
+          <a:srcRect/>
+          <a:stretch/>
+        </p:blipFill>
+        <p:spPr>
+          <a:xfrm>
+            <a:off x="728555" y="6535162"/>
+            <a:ext cx="171450" cy="95250"/>
+          </a:xfrm>
+          <a:prstGeom prst="rect">
+            <a:avLst/>
+          </a:prstGeom>
+          <a:noFill/>
+          <a:ln>
+            <a:noFill/>
+          </a:ln>
+        </p:spPr>
+      </p:pic>
+      <p:sp>
+        <p:nvSpPr>
+          <p:cNvPr id="111" name="Google Shape;111;p13"/>
           <p:cNvSpPr txBox="1"/>
           <p:nvPr/>
         </p:nvSpPr>
         <p:spPr>
           <a:xfrm>
-            <a:off x="8471001" y="2581276"/>
-            <a:ext cx="2224809" cy="300210"/>
+            <a:off x="995255" y="6420594"/>
+            <a:ext cx="2964060" cy="162520"/>
           </a:xfrm>
           <a:prstGeom prst="rect">
             <a:avLst/>
@@ -10948,26 +11521,51 @@
           </a:bodyPr>
           <a:lstStyle/>
           <a:p>
+            <a:pPr marL="0" marR="0" lvl="0" indent="0" algn="l" rtl="0">
+              <a:spcBef>
+                <a:spcPts val="0"/>
+              </a:spcBef>
+              <a:spcAft>
+                <a:spcPts val="0"/>
+              </a:spcAft>
+              <a:buNone/>
+            </a:pPr>
             <a:r>
-              <a:rPr lang="en-US" sz="1951" b="1">
+              <a:rPr lang="en-US" sz="975" b="1" i="0" u="none" strike="noStrike" cap="none">
                 <a:solidFill>
                   <a:srgbClr val="FFFFFF"/>
                 </a:solidFill>
+                <a:latin typeface="Malgun Gothic"/>
+                <a:ea typeface="Malgun Gothic"/>
+                <a:cs typeface="Malgun Gothic"/>
+                <a:sym typeface="Malgun Gothic"/>
               </a:rPr>
-              <a:t>핵심 기술 &amp; 안정성</a:t>
+              <a:t>Sensor Fusion:</a:t>
             </a:r>
-            <a:endParaRPr sz="1800"/>
+            <a:r>
+              <a:rPr lang="en-US" sz="975" b="0" i="0" u="none" strike="noStrike" cap="none">
+                <a:solidFill>
+                  <a:srgbClr val="B0BEC5"/>
+                </a:solidFill>
+                <a:latin typeface="Malgun Gothic"/>
+                <a:ea typeface="Malgun Gothic"/>
+                <a:cs typeface="Malgun Gothic"/>
+                <a:sym typeface="Malgun Gothic"/>
+              </a:rPr>
+              <a:t> 비전/라이다 결합 정밀도 및 생존력 확보</a:t>
+            </a:r>
+            <a:endParaRPr/>
           </a:p>
         </p:txBody>
       </p:sp>
       <p:pic>
         <p:nvPicPr>
-          <p:cNvPr id="94" name="Google Shape;94;p13" descr="image.png"/>
+          <p:cNvPr id="112" name="Google Shape;112;p13" descr="image.png"/>
           <p:cNvPicPr preferRelativeResize="0"/>
           <p:nvPr/>
         </p:nvPicPr>
         <p:blipFill rotWithShape="1">
-          <a:blip r:embed="rId9">
+          <a:blip r:embed="rId22">
             <a:alphaModFix/>
           </a:blip>
           <a:srcRect/>
@@ -10975,8 +11573,8 @@
         </p:blipFill>
         <p:spPr>
           <a:xfrm>
-            <a:off x="914401" y="1885952"/>
-            <a:ext cx="419100" cy="366701"/>
+            <a:off x="3959315" y="6535162"/>
+            <a:ext cx="171450" cy="95250"/>
           </a:xfrm>
           <a:prstGeom prst="rect">
             <a:avLst/>
@@ -10989,14 +11587,14 @@
       </p:pic>
       <p:sp>
         <p:nvSpPr>
-          <p:cNvPr id="95" name="Google Shape;95;p13"/>
+          <p:cNvPr id="113" name="Google Shape;113;p13"/>
           <p:cNvSpPr txBox="1"/>
           <p:nvPr/>
         </p:nvSpPr>
         <p:spPr>
           <a:xfrm>
-            <a:off x="914400" y="3200400"/>
-            <a:ext cx="2806749" cy="886397"/>
+            <a:off x="4226015" y="6420594"/>
+            <a:ext cx="3193851" cy="162520"/>
           </a:xfrm>
           <a:prstGeom prst="rect">
             <a:avLst/>
@@ -11012,209 +11610,248 @@
           </a:bodyPr>
           <a:lstStyle/>
           <a:p>
-            <a:pPr>
-              <a:lnSpc>
-                <a:spcPct val="160000"/>
-              </a:lnSpc>
+            <a:pPr marL="0" marR="0" lvl="0" indent="0" algn="l" rtl="0">
+              <a:spcBef>
+                <a:spcPts val="0"/>
+              </a:spcBef>
+              <a:spcAft>
+                <a:spcPts val="0"/>
+              </a:spcAft>
+              <a:buNone/>
             </a:pPr>
             <a:r>
-              <a:rPr lang="en-US" sz="1200" b="1" dirty="0" err="1">
+              <a:rPr lang="en-US" sz="975" b="1" i="0" u="none" strike="noStrike" cap="none" dirty="0" err="1">
                 <a:solidFill>
-                  <a:srgbClr val="60A5FA"/>
+                  <a:srgbClr val="FFFFFF"/>
                 </a:solidFill>
+                <a:latin typeface="Malgun Gothic"/>
+                <a:ea typeface="Malgun Gothic"/>
+                <a:cs typeface="Malgun Gothic"/>
+                <a:sym typeface="Malgun Gothic"/>
               </a:rPr>
-              <a:t>비전</a:t>
+              <a:t>노이즈</a:t>
             </a:r>
             <a:r>
-              <a:rPr lang="en-US" sz="1200" b="1" dirty="0">
+              <a:rPr lang="en-US" sz="975" b="1" i="0" u="none" strike="noStrike" cap="none" dirty="0">
                 <a:solidFill>
-                  <a:srgbClr val="60A5FA"/>
+                  <a:srgbClr val="FFFFFF"/>
                 </a:solidFill>
+                <a:latin typeface="Malgun Gothic"/>
+                <a:ea typeface="Malgun Gothic"/>
+                <a:cs typeface="Malgun Gothic"/>
+                <a:sym typeface="Malgun Gothic"/>
               </a:rPr>
               <a:t> </a:t>
             </a:r>
             <a:r>
-              <a:rPr lang="en-US" sz="1200" b="1" dirty="0" err="1">
+              <a:rPr lang="en-US" sz="975" b="1" i="0" u="none" strike="noStrike" cap="none" dirty="0" err="1">
                 <a:solidFill>
-                  <a:srgbClr val="60A5FA"/>
+                  <a:srgbClr val="FFFFFF"/>
                 </a:solidFill>
+                <a:latin typeface="Malgun Gothic"/>
+                <a:ea typeface="Malgun Gothic"/>
+                <a:cs typeface="Malgun Gothic"/>
+                <a:sym typeface="Malgun Gothic"/>
               </a:rPr>
-              <a:t>정밀</a:t>
+              <a:t>필터링</a:t>
             </a:r>
             <a:r>
-              <a:rPr lang="en-US" sz="1200" b="1" dirty="0">
+              <a:rPr lang="en-US" sz="975" b="1" i="0" u="none" strike="noStrike" cap="none" dirty="0">
                 <a:solidFill>
-                  <a:srgbClr val="60A5FA"/>
+                  <a:srgbClr val="FFFFFF"/>
                 </a:solidFill>
+                <a:latin typeface="Malgun Gothic"/>
+                <a:ea typeface="Malgun Gothic"/>
+                <a:cs typeface="Malgun Gothic"/>
+                <a:sym typeface="Malgun Gothic"/>
+              </a:rPr>
+              <a:t>:</a:t>
+            </a:r>
+            <a:r>
+              <a:rPr lang="en-US" sz="975" b="0" i="0" u="none" strike="noStrike" cap="none" dirty="0">
+                <a:solidFill>
+                  <a:srgbClr val="B0BEC5"/>
+                </a:solidFill>
+                <a:latin typeface="Malgun Gothic"/>
+                <a:ea typeface="Malgun Gothic"/>
+                <a:cs typeface="Malgun Gothic"/>
+                <a:sym typeface="Malgun Gothic"/>
               </a:rPr>
               <a:t> </a:t>
             </a:r>
             <a:r>
-              <a:rPr lang="en-US" sz="1200" b="1" dirty="0" err="1">
+              <a:rPr lang="en-US" sz="975" b="0" i="0" u="none" strike="noStrike" cap="none" dirty="0" err="1">
                 <a:solidFill>
-                  <a:srgbClr val="60A5FA"/>
+                  <a:srgbClr val="B0BEC5"/>
                 </a:solidFill>
+                <a:latin typeface="Malgun Gothic"/>
+                <a:ea typeface="Malgun Gothic"/>
+                <a:cs typeface="Malgun Gothic"/>
+                <a:sym typeface="Malgun Gothic"/>
               </a:rPr>
-              <a:t>추종</a:t>
+              <a:t>Deadband</a:t>
             </a:r>
             <a:r>
-              <a:rPr lang="en-US" sz="1200" dirty="0" err="1">
+              <a:rPr lang="en-US" sz="975" b="0" i="0" u="none" strike="noStrike" cap="none" dirty="0">
                 <a:solidFill>
-                  <a:srgbClr val="94A3B8"/>
+                  <a:srgbClr val="B0BEC5"/>
                 </a:solidFill>
+                <a:latin typeface="Malgun Gothic"/>
+                <a:ea typeface="Malgun Gothic"/>
+                <a:cs typeface="Malgun Gothic"/>
+                <a:sym typeface="Malgun Gothic"/>
               </a:rPr>
-              <a:t>초기</a:t>
+              <a:t> 및 </a:t>
             </a:r>
             <a:r>
-              <a:rPr lang="en-US" sz="1200" dirty="0">
+              <a:rPr lang="en-US" sz="975" b="0" i="0" u="none" strike="noStrike" cap="none" dirty="0" err="1">
                 <a:solidFill>
-                  <a:srgbClr val="94A3B8"/>
+                  <a:srgbClr val="B0BEC5"/>
                 </a:solidFill>
+                <a:latin typeface="Malgun Gothic"/>
+                <a:ea typeface="Malgun Gothic"/>
+                <a:cs typeface="Malgun Gothic"/>
+                <a:sym typeface="Malgun Gothic"/>
               </a:rPr>
-              <a:t> 3초 </a:t>
+              <a:t>와치독으로</a:t>
             </a:r>
             <a:r>
-              <a:rPr lang="en-US" sz="1200" dirty="0" err="1">
+              <a:rPr lang="en-US" sz="975" b="0" i="0" u="none" strike="noStrike" cap="none" dirty="0">
                 <a:solidFill>
-                  <a:srgbClr val="94A3B8"/>
+                  <a:srgbClr val="B0BEC5"/>
                 </a:solidFill>
-              </a:rPr>
-              <a:t>대기</a:t>
-            </a:r>
-            <a:r>
-              <a:rPr lang="en-US" sz="1200" dirty="0">
-                <a:solidFill>
-                  <a:srgbClr val="94A3B8"/>
-                </a:solidFill>
-              </a:rPr>
-              <a:t> 후 </a:t>
-            </a:r>
-            <a:r>
-              <a:rPr lang="en-US" sz="1200" dirty="0" err="1">
-                <a:solidFill>
-                  <a:srgbClr val="94A3B8"/>
-                </a:solidFill>
-              </a:rPr>
-              <a:t>타겟</a:t>
-            </a:r>
-            <a:r>
-              <a:rPr lang="en-US" sz="1200" dirty="0">
-                <a:solidFill>
-                  <a:srgbClr val="94A3B8"/>
-                </a:solidFill>
+                <a:latin typeface="Malgun Gothic"/>
+                <a:ea typeface="Malgun Gothic"/>
+                <a:cs typeface="Malgun Gothic"/>
+                <a:sym typeface="Malgun Gothic"/>
               </a:rPr>
               <a:t> </a:t>
             </a:r>
             <a:r>
-              <a:rPr lang="en-US" sz="1200" dirty="0" err="1">
+              <a:rPr lang="en-US" sz="975" b="0" i="0" u="none" strike="noStrike" cap="none" dirty="0" err="1">
                 <a:solidFill>
-                  <a:srgbClr val="94A3B8"/>
+                  <a:srgbClr val="B0BEC5"/>
                 </a:solidFill>
+                <a:latin typeface="Malgun Gothic"/>
+                <a:ea typeface="Malgun Gothic"/>
+                <a:cs typeface="Malgun Gothic"/>
+                <a:sym typeface="Malgun Gothic"/>
               </a:rPr>
-              <a:t>데이터를</a:t>
+              <a:t>통신</a:t>
             </a:r>
             <a:r>
-              <a:rPr lang="en-US" sz="1200" dirty="0">
+              <a:rPr lang="en-US" sz="975" b="0" i="0" u="none" strike="noStrike" cap="none" dirty="0">
                 <a:solidFill>
-                  <a:srgbClr val="94A3B8"/>
+                  <a:srgbClr val="B0BEC5"/>
                 </a:solidFill>
+                <a:latin typeface="Malgun Gothic"/>
+                <a:ea typeface="Malgun Gothic"/>
+                <a:cs typeface="Malgun Gothic"/>
+                <a:sym typeface="Malgun Gothic"/>
               </a:rPr>
               <a:t> </a:t>
             </a:r>
             <a:r>
-              <a:rPr lang="en-US" sz="1200" dirty="0" err="1">
+              <a:rPr lang="en-US" sz="975" b="0" i="0" u="none" strike="noStrike" cap="none" dirty="0" err="1">
                 <a:solidFill>
-                  <a:srgbClr val="94A3B8"/>
+                  <a:srgbClr val="B0BEC5"/>
                 </a:solidFill>
+                <a:latin typeface="Malgun Gothic"/>
+                <a:ea typeface="Malgun Gothic"/>
+                <a:cs typeface="Malgun Gothic"/>
+                <a:sym typeface="Malgun Gothic"/>
               </a:rPr>
-              <a:t>확보하고</a:t>
+              <a:t>단절</a:t>
             </a:r>
             <a:r>
-              <a:rPr lang="en-US" sz="1200" dirty="0">
+              <a:rPr lang="en-US" sz="975" b="0" i="0" u="none" strike="noStrike" cap="none" dirty="0">
                 <a:solidFill>
-                  <a:srgbClr val="94A3B8"/>
+                  <a:srgbClr val="B0BEC5"/>
                 </a:solidFill>
-              </a:rPr>
-              <a:t>, 50cm의 </a:t>
-            </a:r>
-            <a:r>
-              <a:rPr lang="en-US" sz="1200" dirty="0" err="1">
-                <a:solidFill>
-                  <a:srgbClr val="94A3B8"/>
-                </a:solidFill>
-              </a:rPr>
-              <a:t>간격을</a:t>
-            </a:r>
-            <a:r>
-              <a:rPr lang="en-US" sz="1200" dirty="0">
-                <a:solidFill>
-                  <a:srgbClr val="94A3B8"/>
-                </a:solidFill>
+                <a:latin typeface="Malgun Gothic"/>
+                <a:ea typeface="Malgun Gothic"/>
+                <a:cs typeface="Malgun Gothic"/>
+                <a:sym typeface="Malgun Gothic"/>
               </a:rPr>
               <a:t> </a:t>
             </a:r>
             <a:r>
-              <a:rPr lang="en-US" sz="1200" dirty="0" err="1">
+              <a:rPr lang="en-US" sz="975" b="0" i="0" u="none" strike="noStrike" cap="none" dirty="0" err="1">
                 <a:solidFill>
-                  <a:srgbClr val="94A3B8"/>
+                  <a:srgbClr val="B0BEC5"/>
                 </a:solidFill>
+                <a:latin typeface="Malgun Gothic"/>
+                <a:ea typeface="Malgun Gothic"/>
+                <a:cs typeface="Malgun Gothic"/>
+                <a:sym typeface="Malgun Gothic"/>
               </a:rPr>
-              <a:t>유지하며</a:t>
+              <a:t>자율</a:t>
             </a:r>
             <a:r>
-              <a:rPr lang="en-US" sz="1200" dirty="0">
+              <a:rPr lang="en-US" sz="975" b="0" i="0" u="none" strike="noStrike" cap="none" dirty="0">
                 <a:solidFill>
-                  <a:srgbClr val="94A3B8"/>
+                  <a:srgbClr val="B0BEC5"/>
                 </a:solidFill>
+                <a:latin typeface="Malgun Gothic"/>
+                <a:ea typeface="Malgun Gothic"/>
+                <a:cs typeface="Malgun Gothic"/>
+                <a:sym typeface="Malgun Gothic"/>
               </a:rPr>
               <a:t> </a:t>
             </a:r>
             <a:r>
-              <a:rPr lang="en-US" sz="1200" dirty="0" err="1">
+              <a:rPr lang="en-US" sz="975" b="0" i="0" u="none" strike="noStrike" cap="none" dirty="0" err="1">
                 <a:solidFill>
-                  <a:srgbClr val="94A3B8"/>
+                  <a:srgbClr val="B0BEC5"/>
                 </a:solidFill>
+                <a:latin typeface="Malgun Gothic"/>
+                <a:ea typeface="Malgun Gothic"/>
+                <a:cs typeface="Malgun Gothic"/>
+                <a:sym typeface="Malgun Gothic"/>
               </a:rPr>
-              <a:t>부드럽게</a:t>
+              <a:t>판단</a:t>
             </a:r>
-            <a:r>
-              <a:rPr lang="en-US" sz="1200" dirty="0">
-                <a:solidFill>
-                  <a:srgbClr val="94A3B8"/>
-                </a:solidFill>
-              </a:rPr>
-              <a:t> </a:t>
-            </a:r>
-            <a:r>
-              <a:rPr lang="en-US" sz="1200" dirty="0" err="1">
-                <a:solidFill>
-                  <a:srgbClr val="94A3B8"/>
-                </a:solidFill>
-              </a:rPr>
-              <a:t>추종합니다</a:t>
-            </a:r>
-            <a:r>
-              <a:rPr lang="en-US" sz="1200" dirty="0">
-                <a:solidFill>
-                  <a:srgbClr val="94A3B8"/>
-                </a:solidFill>
-              </a:rPr>
-              <a:t>.</a:t>
-            </a:r>
-            <a:endParaRPr sz="1800" dirty="0"/>
+            <a:endParaRPr dirty="0"/>
           </a:p>
         </p:txBody>
       </p:sp>
+      <p:pic>
+        <p:nvPicPr>
+          <p:cNvPr id="114" name="Google Shape;114;p13" descr="image.png"/>
+          <p:cNvPicPr preferRelativeResize="0"/>
+          <p:nvPr/>
+        </p:nvPicPr>
+        <p:blipFill rotWithShape="1">
+          <a:blip r:embed="rId23">
+            <a:alphaModFix/>
+          </a:blip>
+          <a:srcRect/>
+          <a:stretch/>
+        </p:blipFill>
+        <p:spPr>
+          <a:xfrm>
+            <a:off x="7419867" y="6535162"/>
+            <a:ext cx="171450" cy="95250"/>
+          </a:xfrm>
+          <a:prstGeom prst="rect">
+            <a:avLst/>
+          </a:prstGeom>
+          <a:noFill/>
+          <a:ln>
+            <a:noFill/>
+          </a:ln>
+        </p:spPr>
+      </p:pic>
       <p:sp>
         <p:nvSpPr>
-          <p:cNvPr id="96" name="Google Shape;96;p13"/>
+          <p:cNvPr id="115" name="Google Shape;115;p13"/>
           <p:cNvSpPr txBox="1"/>
           <p:nvPr/>
         </p:nvSpPr>
         <p:spPr>
           <a:xfrm>
-            <a:off x="914400" y="4369411"/>
-            <a:ext cx="2806749" cy="886397"/>
+            <a:off x="7686567" y="6420594"/>
+            <a:ext cx="3757463" cy="162520"/>
           </a:xfrm>
           <a:prstGeom prst="rect">
             <a:avLst/>
@@ -11230,233 +11867,53 @@
           </a:bodyPr>
           <a:lstStyle/>
           <a:p>
-            <a:pPr>
-              <a:lnSpc>
-                <a:spcPct val="160000"/>
-              </a:lnSpc>
+            <a:pPr marL="0" marR="0" lvl="0" indent="0" algn="l" rtl="0">
+              <a:spcBef>
+                <a:spcPts val="0"/>
+              </a:spcBef>
+              <a:spcAft>
+                <a:spcPts val="0"/>
+              </a:spcAft>
+              <a:buNone/>
             </a:pPr>
             <a:r>
-              <a:rPr lang="en-US" sz="1200" b="1" dirty="0">
+              <a:rPr lang="en-US" sz="975" b="1" i="0" u="none" strike="noStrike" cap="none">
                 <a:solidFill>
-                  <a:srgbClr val="60A5FA"/>
+                  <a:srgbClr val="FFFFFF"/>
                 </a:solidFill>
+                <a:latin typeface="Malgun Gothic"/>
+                <a:ea typeface="Malgun Gothic"/>
+                <a:cs typeface="Malgun Gothic"/>
+                <a:sym typeface="Malgun Gothic"/>
               </a:rPr>
-              <a:t>LiDAR </a:t>
+              <a:t>순차 제어 (Sequential):</a:t>
             </a:r>
             <a:r>
-              <a:rPr lang="en-US" sz="1200" b="1" dirty="0" err="1">
+              <a:rPr lang="en-US" sz="975" b="0" i="0" u="none" strike="noStrike" cap="none">
                 <a:solidFill>
-                  <a:srgbClr val="60A5FA"/>
+                  <a:srgbClr val="B0BEC5"/>
                 </a:solidFill>
+                <a:latin typeface="Malgun Gothic"/>
+                <a:ea typeface="Malgun Gothic"/>
+                <a:cs typeface="Malgun Gothic"/>
+                <a:sym typeface="Malgun Gothic"/>
               </a:rPr>
-              <a:t>긴급</a:t>
+              <a:t> 대각선 이동 시 모터 헛돔 방지, 동력 100% 집중</a:t>
             </a:r>
-            <a:r>
-              <a:rPr lang="en-US" sz="1200" b="1" dirty="0">
-                <a:solidFill>
-                  <a:srgbClr val="60A5FA"/>
-                </a:solidFill>
-              </a:rPr>
-              <a:t> </a:t>
-            </a:r>
-            <a:r>
-              <a:rPr lang="en-US" sz="1200" b="1" dirty="0" err="1">
-                <a:solidFill>
-                  <a:srgbClr val="60A5FA"/>
-                </a:solidFill>
-              </a:rPr>
-              <a:t>회피</a:t>
-            </a:r>
-            <a:r>
-              <a:rPr lang="en-US" sz="1200" dirty="0" err="1">
-                <a:solidFill>
-                  <a:srgbClr val="94A3B8"/>
-                </a:solidFill>
-              </a:rPr>
-              <a:t>전방</a:t>
-            </a:r>
-            <a:r>
-              <a:rPr lang="en-US" sz="1200" dirty="0">
-                <a:solidFill>
-                  <a:srgbClr val="94A3B8"/>
-                </a:solidFill>
-              </a:rPr>
-              <a:t> 35cm </a:t>
-            </a:r>
-            <a:r>
-              <a:rPr lang="en-US" sz="1200" dirty="0" err="1">
-                <a:solidFill>
-                  <a:srgbClr val="94A3B8"/>
-                </a:solidFill>
-              </a:rPr>
-              <a:t>이내</a:t>
-            </a:r>
-            <a:r>
-              <a:rPr lang="en-US" sz="1200" dirty="0">
-                <a:solidFill>
-                  <a:srgbClr val="94A3B8"/>
-                </a:solidFill>
-              </a:rPr>
-              <a:t> </a:t>
-            </a:r>
-            <a:r>
-              <a:rPr lang="en-US" sz="1200" dirty="0" err="1">
-                <a:solidFill>
-                  <a:srgbClr val="94A3B8"/>
-                </a:solidFill>
-              </a:rPr>
-              <a:t>장애물</a:t>
-            </a:r>
-            <a:r>
-              <a:rPr lang="en-US" sz="1200" dirty="0">
-                <a:solidFill>
-                  <a:srgbClr val="94A3B8"/>
-                </a:solidFill>
-              </a:rPr>
-              <a:t> </a:t>
-            </a:r>
-            <a:r>
-              <a:rPr lang="en-US" sz="1200" dirty="0" err="1">
-                <a:solidFill>
-                  <a:srgbClr val="94A3B8"/>
-                </a:solidFill>
-              </a:rPr>
-              <a:t>감지</a:t>
-            </a:r>
-            <a:r>
-              <a:rPr lang="en-US" sz="1200" dirty="0">
-                <a:solidFill>
-                  <a:srgbClr val="94A3B8"/>
-                </a:solidFill>
-              </a:rPr>
-              <a:t> 시 </a:t>
-            </a:r>
-            <a:r>
-              <a:rPr lang="en-US" sz="1200" dirty="0" err="1">
-                <a:solidFill>
-                  <a:srgbClr val="94A3B8"/>
-                </a:solidFill>
-              </a:rPr>
-              <a:t>즉각</a:t>
-            </a:r>
-            <a:r>
-              <a:rPr lang="en-US" sz="1200" dirty="0">
-                <a:solidFill>
-                  <a:srgbClr val="94A3B8"/>
-                </a:solidFill>
-              </a:rPr>
-              <a:t> </a:t>
-            </a:r>
-            <a:r>
-              <a:rPr lang="en-US" sz="1200" dirty="0" err="1">
-                <a:solidFill>
-                  <a:srgbClr val="94A3B8"/>
-                </a:solidFill>
-              </a:rPr>
-              <a:t>추종을</a:t>
-            </a:r>
-            <a:r>
-              <a:rPr lang="en-US" sz="1200" dirty="0">
-                <a:solidFill>
-                  <a:srgbClr val="94A3B8"/>
-                </a:solidFill>
-              </a:rPr>
-              <a:t> </a:t>
-            </a:r>
-            <a:r>
-              <a:rPr lang="en-US" sz="1200" dirty="0" err="1">
-                <a:solidFill>
-                  <a:srgbClr val="94A3B8"/>
-                </a:solidFill>
-              </a:rPr>
-              <a:t>멈추고</a:t>
-            </a:r>
-            <a:r>
-              <a:rPr lang="en-US" sz="1200" dirty="0">
-                <a:solidFill>
-                  <a:srgbClr val="94A3B8"/>
-                </a:solidFill>
-              </a:rPr>
-              <a:t> </a:t>
-            </a:r>
-            <a:r>
-              <a:rPr lang="en-US" sz="1200" dirty="0" err="1">
-                <a:solidFill>
-                  <a:srgbClr val="94A3B8"/>
-                </a:solidFill>
-              </a:rPr>
-              <a:t>좌우</a:t>
-            </a:r>
-            <a:r>
-              <a:rPr lang="en-US" sz="1200" dirty="0">
-                <a:solidFill>
-                  <a:srgbClr val="94A3B8"/>
-                </a:solidFill>
-              </a:rPr>
-              <a:t> </a:t>
-            </a:r>
-            <a:r>
-              <a:rPr lang="en-US" sz="1200" dirty="0" err="1">
-                <a:solidFill>
-                  <a:srgbClr val="94A3B8"/>
-                </a:solidFill>
-              </a:rPr>
-              <a:t>공간을</a:t>
-            </a:r>
-            <a:r>
-              <a:rPr lang="en-US" sz="1200" dirty="0">
-                <a:solidFill>
-                  <a:srgbClr val="94A3B8"/>
-                </a:solidFill>
-              </a:rPr>
-              <a:t> </a:t>
-            </a:r>
-            <a:r>
-              <a:rPr lang="en-US" sz="1200" dirty="0" err="1">
-                <a:solidFill>
-                  <a:srgbClr val="94A3B8"/>
-                </a:solidFill>
-              </a:rPr>
-              <a:t>계산하여</a:t>
-            </a:r>
-            <a:r>
-              <a:rPr lang="en-US" sz="1200" dirty="0">
-                <a:solidFill>
-                  <a:srgbClr val="94A3B8"/>
-                </a:solidFill>
-              </a:rPr>
-              <a:t> </a:t>
-            </a:r>
-            <a:r>
-              <a:rPr lang="en-US" sz="1200" dirty="0" err="1">
-                <a:solidFill>
-                  <a:srgbClr val="94A3B8"/>
-                </a:solidFill>
-              </a:rPr>
-              <a:t>회피합니다</a:t>
-            </a:r>
-            <a:r>
-              <a:rPr lang="en-US" sz="1200" dirty="0">
-                <a:solidFill>
-                  <a:srgbClr val="94A3B8"/>
-                </a:solidFill>
-              </a:rPr>
-              <a:t>.</a:t>
-            </a:r>
-            <a:endParaRPr sz="1800" dirty="0"/>
+            <a:endParaRPr/>
           </a:p>
         </p:txBody>
       </p:sp>
       <p:sp>
         <p:nvSpPr>
-          <p:cNvPr id="97" name="Google Shape;97;p13"/>
+          <p:cNvPr id="116" name="Google Shape;116;p13"/>
           <p:cNvSpPr txBox="1"/>
           <p:nvPr/>
         </p:nvSpPr>
         <p:spPr>
           <a:xfrm>
-            <a:off x="914399" y="5652337"/>
-            <a:ext cx="2806749" cy="886397"/>
+            <a:off x="700587" y="1702593"/>
+            <a:ext cx="1989623" cy="257175"/>
           </a:xfrm>
           <a:prstGeom prst="rect">
             <a:avLst/>
@@ -11472,231 +11929,39 @@
           </a:bodyPr>
           <a:lstStyle/>
           <a:p>
-            <a:pPr>
-              <a:lnSpc>
-                <a:spcPct val="160000"/>
-              </a:lnSpc>
+            <a:pPr marL="0" marR="0" lvl="0" indent="0" algn="l" rtl="0">
+              <a:spcBef>
+                <a:spcPts val="0"/>
+              </a:spcBef>
+              <a:spcAft>
+                <a:spcPts val="0"/>
+              </a:spcAft>
+              <a:buNone/>
             </a:pPr>
             <a:r>
-              <a:rPr lang="en-US" sz="1200" b="1" dirty="0">
+              <a:rPr lang="en-US" sz="1500" b="1" i="0" u="none" strike="noStrike" cap="none">
                 <a:solidFill>
-                  <a:srgbClr val="60A5FA"/>
+                  <a:srgbClr val="FFFFFF"/>
                 </a:solidFill>
+                <a:latin typeface="Malgun Gothic"/>
+                <a:ea typeface="Malgun Gothic"/>
+                <a:cs typeface="Malgun Gothic"/>
+                <a:sym typeface="Malgun Gothic"/>
               </a:rPr>
-              <a:t>Watchdog </a:t>
+              <a:t>Phase 1: 유도 및 추종</a:t>
             </a:r>
-            <a:r>
-              <a:rPr lang="en-US" sz="1200" b="1" dirty="0" err="1">
-                <a:solidFill>
-                  <a:srgbClr val="60A5FA"/>
-                </a:solidFill>
-              </a:rPr>
-              <a:t>복구</a:t>
-            </a:r>
-            <a:r>
-              <a:rPr lang="en-US" sz="1200" dirty="0" err="1">
-                <a:solidFill>
-                  <a:srgbClr val="94A3B8"/>
-                </a:solidFill>
-              </a:rPr>
-              <a:t>타겟이</a:t>
-            </a:r>
-            <a:r>
-              <a:rPr lang="en-US" sz="1200" dirty="0">
-                <a:solidFill>
-                  <a:srgbClr val="94A3B8"/>
-                </a:solidFill>
-              </a:rPr>
-              <a:t> 3초 </a:t>
-            </a:r>
-            <a:r>
-              <a:rPr lang="en-US" sz="1200" dirty="0" err="1">
-                <a:solidFill>
-                  <a:srgbClr val="94A3B8"/>
-                </a:solidFill>
-              </a:rPr>
-              <a:t>이상</a:t>
-            </a:r>
-            <a:r>
-              <a:rPr lang="en-US" sz="1200" dirty="0">
-                <a:solidFill>
-                  <a:srgbClr val="94A3B8"/>
-                </a:solidFill>
-              </a:rPr>
-              <a:t> </a:t>
-            </a:r>
-            <a:r>
-              <a:rPr lang="en-US" sz="1200" dirty="0" err="1">
-                <a:solidFill>
-                  <a:srgbClr val="94A3B8"/>
-                </a:solidFill>
-              </a:rPr>
-              <a:t>유실될</a:t>
-            </a:r>
-            <a:r>
-              <a:rPr lang="en-US" sz="1200" dirty="0">
-                <a:solidFill>
-                  <a:srgbClr val="94A3B8"/>
-                </a:solidFill>
-              </a:rPr>
-              <a:t> </a:t>
-            </a:r>
-            <a:r>
-              <a:rPr lang="en-US" sz="1200" dirty="0" err="1">
-                <a:solidFill>
-                  <a:srgbClr val="94A3B8"/>
-                </a:solidFill>
-              </a:rPr>
-              <a:t>경우</a:t>
-            </a:r>
-            <a:r>
-              <a:rPr lang="en-US" sz="1200" dirty="0">
-                <a:solidFill>
-                  <a:srgbClr val="94A3B8"/>
-                </a:solidFill>
-              </a:rPr>
-              <a:t>, </a:t>
-            </a:r>
-            <a:r>
-              <a:rPr lang="en-US" sz="1200" dirty="0" err="1">
-                <a:solidFill>
-                  <a:srgbClr val="94A3B8"/>
-                </a:solidFill>
-              </a:rPr>
-              <a:t>마지막</a:t>
-            </a:r>
-            <a:r>
-              <a:rPr lang="en-US" sz="1200" dirty="0">
-                <a:solidFill>
-                  <a:srgbClr val="94A3B8"/>
-                </a:solidFill>
-              </a:rPr>
-              <a:t> </a:t>
-            </a:r>
-            <a:r>
-              <a:rPr lang="en-US" sz="1200" dirty="0" err="1">
-                <a:solidFill>
-                  <a:srgbClr val="94A3B8"/>
-                </a:solidFill>
-              </a:rPr>
-              <a:t>방향을</a:t>
-            </a:r>
-            <a:r>
-              <a:rPr lang="en-US" sz="1200" dirty="0">
-                <a:solidFill>
-                  <a:srgbClr val="94A3B8"/>
-                </a:solidFill>
-              </a:rPr>
-              <a:t> </a:t>
-            </a:r>
-            <a:r>
-              <a:rPr lang="en-US" sz="1200" dirty="0" err="1">
-                <a:solidFill>
-                  <a:srgbClr val="94A3B8"/>
-                </a:solidFill>
-              </a:rPr>
-              <a:t>기억하고</a:t>
-            </a:r>
-            <a:r>
-              <a:rPr lang="en-US" sz="1200" dirty="0">
-                <a:solidFill>
-                  <a:srgbClr val="94A3B8"/>
-                </a:solidFill>
-              </a:rPr>
-              <a:t> </a:t>
-            </a:r>
-            <a:r>
-              <a:rPr lang="en-US" sz="1200" dirty="0" err="1">
-                <a:solidFill>
-                  <a:srgbClr val="94A3B8"/>
-                </a:solidFill>
-              </a:rPr>
-              <a:t>해당</a:t>
-            </a:r>
-            <a:r>
-              <a:rPr lang="en-US" sz="1200" dirty="0">
-                <a:solidFill>
-                  <a:srgbClr val="94A3B8"/>
-                </a:solidFill>
-              </a:rPr>
-              <a:t> </a:t>
-            </a:r>
-            <a:r>
-              <a:rPr lang="en-US" sz="1200" dirty="0" err="1">
-                <a:solidFill>
-                  <a:srgbClr val="94A3B8"/>
-                </a:solidFill>
-              </a:rPr>
-              <a:t>방향으로</a:t>
-            </a:r>
-            <a:r>
-              <a:rPr lang="en-US" sz="1200" dirty="0">
-                <a:solidFill>
-                  <a:srgbClr val="94A3B8"/>
-                </a:solidFill>
-              </a:rPr>
-              <a:t> </a:t>
-            </a:r>
-            <a:r>
-              <a:rPr lang="en-US" sz="1200" dirty="0" err="1">
-                <a:solidFill>
-                  <a:srgbClr val="94A3B8"/>
-                </a:solidFill>
-              </a:rPr>
-              <a:t>무한</a:t>
-            </a:r>
-            <a:r>
-              <a:rPr lang="en-US" sz="1200" dirty="0">
-                <a:solidFill>
-                  <a:srgbClr val="94A3B8"/>
-                </a:solidFill>
-              </a:rPr>
-              <a:t> </a:t>
-            </a:r>
-            <a:r>
-              <a:rPr lang="en-US" sz="1200" dirty="0" err="1">
-                <a:solidFill>
-                  <a:srgbClr val="94A3B8"/>
-                </a:solidFill>
-              </a:rPr>
-              <a:t>탐색을</a:t>
-            </a:r>
-            <a:r>
-              <a:rPr lang="en-US" sz="1200" dirty="0">
-                <a:solidFill>
-                  <a:srgbClr val="94A3B8"/>
-                </a:solidFill>
-              </a:rPr>
-              <a:t> </a:t>
-            </a:r>
-            <a:r>
-              <a:rPr lang="en-US" sz="1200" dirty="0" err="1">
-                <a:solidFill>
-                  <a:srgbClr val="94A3B8"/>
-                </a:solidFill>
-              </a:rPr>
-              <a:t>시작합니다</a:t>
-            </a:r>
-            <a:r>
-              <a:rPr lang="en-US" sz="1200" dirty="0">
-                <a:solidFill>
-                  <a:srgbClr val="94A3B8"/>
-                </a:solidFill>
-              </a:rPr>
-              <a:t>.</a:t>
-            </a:r>
-            <a:endParaRPr sz="1800" dirty="0"/>
+            <a:endParaRPr/>
           </a:p>
         </p:txBody>
       </p:sp>
       <p:pic>
         <p:nvPicPr>
-          <p:cNvPr id="98" name="Google Shape;98;p13" descr="image.png"/>
+          <p:cNvPr id="117" name="Google Shape;117;p13" descr="image.png"/>
           <p:cNvPicPr preferRelativeResize="0"/>
           <p:nvPr/>
         </p:nvPicPr>
         <p:blipFill rotWithShape="1">
-          <a:blip r:embed="rId10">
+          <a:blip r:embed="rId24">
             <a:alphaModFix/>
           </a:blip>
           <a:srcRect/>
@@ -11704,8 +11969,8 @@
         </p:blipFill>
         <p:spPr>
           <a:xfrm>
-            <a:off x="4692699" y="1885952"/>
-            <a:ext cx="419100" cy="366701"/>
+            <a:off x="3291238" y="1716881"/>
+            <a:ext cx="628798" cy="228600"/>
           </a:xfrm>
           <a:prstGeom prst="rect">
             <a:avLst/>
@@ -11718,14 +11983,14 @@
       </p:pic>
       <p:sp>
         <p:nvSpPr>
-          <p:cNvPr id="99" name="Google Shape;99;p13"/>
+          <p:cNvPr id="118" name="Google Shape;118;p13"/>
           <p:cNvSpPr txBox="1"/>
           <p:nvPr/>
         </p:nvSpPr>
         <p:spPr>
           <a:xfrm>
-            <a:off x="4692700" y="3200400"/>
-            <a:ext cx="2806749" cy="886397"/>
+            <a:off x="4510587" y="1702593"/>
+            <a:ext cx="2389673" cy="257175"/>
           </a:xfrm>
           <a:prstGeom prst="rect">
             <a:avLst/>
@@ -11741,233 +12006,95 @@
           </a:bodyPr>
           <a:lstStyle/>
           <a:p>
-            <a:pPr>
-              <a:lnSpc>
-                <a:spcPct val="160000"/>
-              </a:lnSpc>
+            <a:pPr marL="0" marR="0" lvl="0" indent="0" algn="l" rtl="0">
+              <a:spcBef>
+                <a:spcPts val="0"/>
+              </a:spcBef>
+              <a:spcAft>
+                <a:spcPts val="0"/>
+              </a:spcAft>
+              <a:buNone/>
             </a:pPr>
             <a:r>
-              <a:rPr lang="en-US" sz="1200" b="1" dirty="0" err="1">
+              <a:rPr lang="en-US" sz="1500" b="1" i="0" u="none" strike="noStrike" cap="none">
                 <a:solidFill>
-                  <a:srgbClr val="34D399"/>
+                  <a:srgbClr val="FFFFFF"/>
                 </a:solidFill>
+                <a:latin typeface="Malgun Gothic"/>
+                <a:ea typeface="Malgun Gothic"/>
+                <a:cs typeface="Malgun Gothic"/>
+                <a:sym typeface="Malgun Gothic"/>
               </a:rPr>
-              <a:t>자세</a:t>
+              <a:t>Phase 2: 다단계 정밀 도킹</a:t>
             </a:r>
-            <a:r>
-              <a:rPr lang="en-US" sz="1200" b="1" dirty="0">
-                <a:solidFill>
-                  <a:srgbClr val="34D399"/>
-                </a:solidFill>
-              </a:rPr>
-              <a:t> </a:t>
-            </a:r>
-            <a:r>
-              <a:rPr lang="en-US" sz="1200" b="1" dirty="0" err="1">
-                <a:solidFill>
-                  <a:srgbClr val="34D399"/>
-                </a:solidFill>
-              </a:rPr>
-              <a:t>정렬</a:t>
-            </a:r>
-            <a:r>
-              <a:rPr lang="en-US" sz="1200" b="1" dirty="0">
-                <a:solidFill>
-                  <a:srgbClr val="34D399"/>
-                </a:solidFill>
-              </a:rPr>
-              <a:t> &amp; </a:t>
-            </a:r>
-            <a:r>
-              <a:rPr lang="en-US" sz="1200" b="1" dirty="0" err="1">
-                <a:solidFill>
-                  <a:srgbClr val="34D399"/>
-                </a:solidFill>
-              </a:rPr>
-              <a:t>안정화</a:t>
-            </a:r>
-            <a:r>
-              <a:rPr lang="en-US" sz="1200" dirty="0" err="1">
-                <a:solidFill>
-                  <a:srgbClr val="94A3B8"/>
-                </a:solidFill>
-              </a:rPr>
-              <a:t>AMCL</a:t>
-            </a:r>
-            <a:r>
-              <a:rPr lang="en-US" sz="1200" dirty="0">
-                <a:solidFill>
-                  <a:srgbClr val="94A3B8"/>
-                </a:solidFill>
-              </a:rPr>
-              <a:t> </a:t>
-            </a:r>
-            <a:r>
-              <a:rPr lang="en-US" sz="1200" dirty="0" err="1">
-                <a:solidFill>
-                  <a:srgbClr val="94A3B8"/>
-                </a:solidFill>
-              </a:rPr>
-              <a:t>기반</a:t>
-            </a:r>
-            <a:r>
-              <a:rPr lang="en-US" sz="1200" dirty="0">
-                <a:solidFill>
-                  <a:srgbClr val="94A3B8"/>
-                </a:solidFill>
-              </a:rPr>
-              <a:t> </a:t>
-            </a:r>
-            <a:r>
-              <a:rPr lang="en-US" sz="1200" dirty="0">
-                <a:solidFill>
-                  <a:srgbClr val="94A3B8"/>
-                </a:solidFill>
-              </a:rPr>
-              <a:t> </a:t>
-            </a:r>
-            <a:r>
-              <a:rPr lang="en-US" sz="1200" dirty="0" err="1">
-                <a:solidFill>
-                  <a:srgbClr val="94A3B8"/>
-                </a:solidFill>
-              </a:rPr>
-              <a:t>정렬</a:t>
-            </a:r>
-            <a:r>
-              <a:rPr lang="en-US" sz="1200" dirty="0">
-                <a:solidFill>
-                  <a:srgbClr val="94A3B8"/>
-                </a:solidFill>
-              </a:rPr>
-              <a:t> 후, </a:t>
-            </a:r>
-            <a:r>
-              <a:rPr lang="en-US" sz="1200" dirty="0" err="1">
-                <a:solidFill>
-                  <a:srgbClr val="94A3B8"/>
-                </a:solidFill>
-              </a:rPr>
-              <a:t>관성</a:t>
-            </a:r>
-            <a:r>
-              <a:rPr lang="en-US" sz="1200" dirty="0">
-                <a:solidFill>
-                  <a:srgbClr val="94A3B8"/>
-                </a:solidFill>
-              </a:rPr>
-              <a:t> </a:t>
-            </a:r>
-            <a:r>
-              <a:rPr lang="en-US" sz="1200" dirty="0" err="1">
-                <a:solidFill>
-                  <a:srgbClr val="94A3B8"/>
-                </a:solidFill>
-              </a:rPr>
-              <a:t>출렁임</a:t>
-            </a:r>
-            <a:r>
-              <a:rPr lang="en-US" sz="1200" dirty="0">
-                <a:solidFill>
-                  <a:srgbClr val="94A3B8"/>
-                </a:solidFill>
-              </a:rPr>
-              <a:t> </a:t>
-            </a:r>
-            <a:r>
-              <a:rPr lang="en-US" sz="1200" dirty="0" err="1">
-                <a:solidFill>
-                  <a:srgbClr val="94A3B8"/>
-                </a:solidFill>
-              </a:rPr>
-              <a:t>방지를</a:t>
-            </a:r>
-            <a:r>
-              <a:rPr lang="en-US" sz="1200" dirty="0">
-                <a:solidFill>
-                  <a:srgbClr val="94A3B8"/>
-                </a:solidFill>
-              </a:rPr>
-              <a:t> </a:t>
-            </a:r>
-            <a:r>
-              <a:rPr lang="en-US" sz="1200" dirty="0" err="1">
-                <a:solidFill>
-                  <a:srgbClr val="94A3B8"/>
-                </a:solidFill>
-              </a:rPr>
-              <a:t>위해</a:t>
-            </a:r>
-            <a:r>
-              <a:rPr lang="en-US" sz="1200" dirty="0">
-                <a:solidFill>
-                  <a:srgbClr val="94A3B8"/>
-                </a:solidFill>
-              </a:rPr>
-              <a:t> </a:t>
-            </a:r>
-            <a:r>
-              <a:rPr lang="en-US" sz="1200" dirty="0" err="1">
-                <a:solidFill>
-                  <a:srgbClr val="94A3B8"/>
-                </a:solidFill>
-              </a:rPr>
-              <a:t>기체를</a:t>
-            </a:r>
-            <a:r>
-              <a:rPr lang="en-US" sz="1200" dirty="0">
-                <a:solidFill>
-                  <a:srgbClr val="94A3B8"/>
-                </a:solidFill>
-              </a:rPr>
-              <a:t> 1.5초간 </a:t>
-            </a:r>
-            <a:r>
-              <a:rPr lang="en-US" sz="1200" dirty="0" err="1">
-                <a:solidFill>
-                  <a:srgbClr val="94A3B8"/>
-                </a:solidFill>
-              </a:rPr>
-              <a:t>완벽히</a:t>
-            </a:r>
-            <a:r>
-              <a:rPr lang="en-US" sz="1200" dirty="0">
-                <a:solidFill>
-                  <a:srgbClr val="94A3B8"/>
-                </a:solidFill>
-              </a:rPr>
-              <a:t> </a:t>
-            </a:r>
-            <a:r>
-              <a:rPr lang="en-US" sz="1200" dirty="0" err="1">
-                <a:solidFill>
-                  <a:srgbClr val="94A3B8"/>
-                </a:solidFill>
-              </a:rPr>
-              <a:t>정지시킵니다</a:t>
-            </a:r>
-            <a:r>
-              <a:rPr lang="en-US" sz="1200" dirty="0">
-                <a:solidFill>
-                  <a:srgbClr val="94A3B8"/>
-                </a:solidFill>
-              </a:rPr>
-              <a:t>.</a:t>
-            </a:r>
-            <a:endParaRPr sz="1800" dirty="0"/>
+            <a:endParaRPr/>
           </a:p>
         </p:txBody>
       </p:sp>
+      <p:pic>
+        <p:nvPicPr>
+          <p:cNvPr id="119" name="Google Shape;119;p13" descr="image.png"/>
+          <p:cNvPicPr preferRelativeResize="0"/>
+          <p:nvPr/>
+        </p:nvPicPr>
+        <p:blipFill rotWithShape="1">
+          <a:blip r:embed="rId25">
+            <a:alphaModFix/>
+          </a:blip>
+          <a:srcRect/>
+          <a:stretch/>
+        </p:blipFill>
+        <p:spPr>
+          <a:xfrm>
+            <a:off x="10911238" y="1716881"/>
+            <a:ext cx="628798" cy="228600"/>
+          </a:xfrm>
+          <a:prstGeom prst="rect">
+            <a:avLst/>
+          </a:prstGeom>
+          <a:noFill/>
+          <a:ln>
+            <a:noFill/>
+          </a:ln>
+        </p:spPr>
+      </p:pic>
+      <p:pic>
+        <p:nvPicPr>
+          <p:cNvPr id="120" name="Google Shape;120;p13" descr="image.png"/>
+          <p:cNvPicPr preferRelativeResize="0"/>
+          <p:nvPr/>
+        </p:nvPicPr>
+        <p:blipFill rotWithShape="1">
+          <a:blip r:embed="rId26">
+            <a:alphaModFix/>
+          </a:blip>
+          <a:srcRect/>
+          <a:stretch/>
+        </p:blipFill>
+        <p:spPr>
+          <a:xfrm>
+            <a:off x="710112" y="2264568"/>
+            <a:ext cx="742950" cy="504825"/>
+          </a:xfrm>
+          <a:prstGeom prst="rect">
+            <a:avLst/>
+          </a:prstGeom>
+          <a:noFill/>
+          <a:ln>
+            <a:noFill/>
+          </a:ln>
+        </p:spPr>
+      </p:pic>
       <p:sp>
         <p:nvSpPr>
-          <p:cNvPr id="100" name="Google Shape;100;p13"/>
+          <p:cNvPr id="121" name="Google Shape;121;p13"/>
           <p:cNvSpPr txBox="1"/>
           <p:nvPr/>
         </p:nvSpPr>
         <p:spPr>
           <a:xfrm>
-            <a:off x="4750000" y="4401311"/>
-            <a:ext cx="2806749" cy="886397"/>
+            <a:off x="1576887" y="2262782"/>
+            <a:ext cx="2460307" cy="171450"/>
           </a:xfrm>
           <a:prstGeom prst="rect">
             <a:avLst/>
@@ -11983,241 +12110,41 @@
           </a:bodyPr>
           <a:lstStyle/>
           <a:p>
-            <a:pPr>
-              <a:lnSpc>
-                <a:spcPct val="160000"/>
-              </a:lnSpc>
+            <a:pPr marL="0" marR="0" lvl="0" indent="0" algn="l" rtl="0">
+              <a:spcBef>
+                <a:spcPts val="0"/>
+              </a:spcBef>
+              <a:spcAft>
+                <a:spcPts val="0"/>
+              </a:spcAft>
+              <a:buNone/>
             </a:pPr>
             <a:r>
-              <a:rPr lang="en-US" sz="1200" b="1" dirty="0" err="1">
+              <a:rPr lang="en-US" sz="1050" b="1" i="0" u="none" strike="noStrike" cap="none">
                 <a:solidFill>
-                  <a:srgbClr val="34D399"/>
+                  <a:srgbClr val="FFFFFF"/>
                 </a:solidFill>
+                <a:latin typeface="Malgun Gothic"/>
+                <a:ea typeface="Malgun Gothic"/>
+                <a:cs typeface="Malgun Gothic"/>
+                <a:sym typeface="Malgun Gothic"/>
               </a:rPr>
-              <a:t>시야</a:t>
+              <a:t>정밀 비전 추종</a:t>
             </a:r>
-            <a:r>
-              <a:rPr lang="en-US" sz="1200" b="1" dirty="0">
-                <a:solidFill>
-                  <a:srgbClr val="34D399"/>
-                </a:solidFill>
-              </a:rPr>
-              <a:t> </a:t>
-            </a:r>
-            <a:r>
-              <a:rPr lang="en-US" sz="1200" b="1" dirty="0" err="1">
-                <a:solidFill>
-                  <a:srgbClr val="34D399"/>
-                </a:solidFill>
-              </a:rPr>
-              <a:t>탐색</a:t>
-            </a:r>
-            <a:r>
-              <a:rPr lang="en-US" sz="1200" b="1" dirty="0">
-                <a:solidFill>
-                  <a:srgbClr val="34D399"/>
-                </a:solidFill>
-              </a:rPr>
-              <a:t> &amp; </a:t>
-            </a:r>
-            <a:r>
-              <a:rPr lang="en-US" sz="1200" b="1" dirty="0" err="1">
-                <a:solidFill>
-                  <a:srgbClr val="34D399"/>
-                </a:solidFill>
-              </a:rPr>
-              <a:t>중앙</a:t>
-            </a:r>
-            <a:r>
-              <a:rPr lang="en-US" sz="1200" b="1" dirty="0">
-                <a:solidFill>
-                  <a:srgbClr val="34D399"/>
-                </a:solidFill>
-              </a:rPr>
-              <a:t> </a:t>
-            </a:r>
-            <a:r>
-              <a:rPr lang="en-US" sz="1200" b="1" dirty="0" err="1">
-                <a:solidFill>
-                  <a:srgbClr val="34D399"/>
-                </a:solidFill>
-              </a:rPr>
-              <a:t>정렬</a:t>
-            </a:r>
-            <a:r>
-              <a:rPr lang="en-US" sz="1200" dirty="0" err="1">
-                <a:solidFill>
-                  <a:srgbClr val="94A3B8"/>
-                </a:solidFill>
-              </a:rPr>
-              <a:t>최초</a:t>
-            </a:r>
-            <a:r>
-              <a:rPr lang="en-US" sz="1200" dirty="0">
-                <a:solidFill>
-                  <a:srgbClr val="94A3B8"/>
-                </a:solidFill>
-              </a:rPr>
-              <a:t> </a:t>
-            </a:r>
-            <a:r>
-              <a:rPr lang="en-US" sz="1200" dirty="0" err="1">
-                <a:solidFill>
-                  <a:srgbClr val="94A3B8"/>
-                </a:solidFill>
-              </a:rPr>
-              <a:t>회전</a:t>
-            </a:r>
-            <a:r>
-              <a:rPr lang="en-US" sz="1200" dirty="0">
-                <a:solidFill>
-                  <a:srgbClr val="94A3B8"/>
-                </a:solidFill>
-              </a:rPr>
-              <a:t> </a:t>
-            </a:r>
-            <a:r>
-              <a:rPr lang="en-US" sz="1200" dirty="0" err="1">
-                <a:solidFill>
-                  <a:srgbClr val="94A3B8"/>
-                </a:solidFill>
-              </a:rPr>
-              <a:t>방향을</a:t>
-            </a:r>
-            <a:r>
-              <a:rPr lang="en-US" sz="1200" dirty="0">
-                <a:solidFill>
-                  <a:srgbClr val="94A3B8"/>
-                </a:solidFill>
-              </a:rPr>
-              <a:t> </a:t>
-            </a:r>
-            <a:r>
-              <a:rPr lang="en-US" sz="1200" dirty="0" err="1">
-                <a:solidFill>
-                  <a:srgbClr val="94A3B8"/>
-                </a:solidFill>
-              </a:rPr>
-              <a:t>메모리에</a:t>
-            </a:r>
-            <a:r>
-              <a:rPr lang="en-US" sz="1200" dirty="0">
-                <a:solidFill>
-                  <a:srgbClr val="94A3B8"/>
-                </a:solidFill>
-              </a:rPr>
-              <a:t> </a:t>
-            </a:r>
-            <a:r>
-              <a:rPr lang="en-US" sz="1200" dirty="0" err="1">
-                <a:solidFill>
-                  <a:srgbClr val="94A3B8"/>
-                </a:solidFill>
-              </a:rPr>
-              <a:t>기록하여</a:t>
-            </a:r>
-            <a:r>
-              <a:rPr lang="en-US" sz="1200" dirty="0">
-                <a:solidFill>
-                  <a:srgbClr val="94A3B8"/>
-                </a:solidFill>
-              </a:rPr>
-              <a:t> </a:t>
-            </a:r>
-            <a:r>
-              <a:rPr lang="en-US" sz="1200" dirty="0" err="1">
-                <a:solidFill>
-                  <a:srgbClr val="94A3B8"/>
-                </a:solidFill>
-              </a:rPr>
-              <a:t>게걸음</a:t>
-            </a:r>
-            <a:r>
-              <a:rPr lang="en-US" sz="1200" dirty="0">
-                <a:solidFill>
-                  <a:srgbClr val="94A3B8"/>
-                </a:solidFill>
-              </a:rPr>
-              <a:t> </a:t>
-            </a:r>
-            <a:r>
-              <a:rPr lang="en-US" sz="1200" dirty="0" err="1">
-                <a:solidFill>
-                  <a:srgbClr val="94A3B8"/>
-                </a:solidFill>
-              </a:rPr>
-              <a:t>탐색으로</a:t>
-            </a:r>
-            <a:r>
-              <a:rPr lang="en-US" sz="1200" dirty="0">
-                <a:solidFill>
-                  <a:srgbClr val="94A3B8"/>
-                </a:solidFill>
-              </a:rPr>
-              <a:t> </a:t>
-            </a:r>
-            <a:r>
-              <a:rPr lang="en-US" sz="1200" dirty="0" err="1">
-                <a:solidFill>
-                  <a:srgbClr val="94A3B8"/>
-                </a:solidFill>
-              </a:rPr>
-              <a:t>오차</a:t>
-            </a:r>
-            <a:r>
-              <a:rPr lang="en-US" sz="1200" dirty="0">
-                <a:solidFill>
-                  <a:srgbClr val="94A3B8"/>
-                </a:solidFill>
-              </a:rPr>
-              <a:t> 8cm </a:t>
-            </a:r>
-            <a:r>
-              <a:rPr lang="en-US" sz="1200" dirty="0" err="1">
-                <a:solidFill>
-                  <a:srgbClr val="94A3B8"/>
-                </a:solidFill>
-              </a:rPr>
-              <a:t>이내로</a:t>
-            </a:r>
-            <a:r>
-              <a:rPr lang="en-US" sz="1200" dirty="0">
-                <a:solidFill>
-                  <a:srgbClr val="94A3B8"/>
-                </a:solidFill>
-              </a:rPr>
-              <a:t> </a:t>
-            </a:r>
-            <a:r>
-              <a:rPr lang="en-US" sz="1200" dirty="0" err="1">
-                <a:solidFill>
-                  <a:srgbClr val="94A3B8"/>
-                </a:solidFill>
-              </a:rPr>
-              <a:t>조향합니다</a:t>
-            </a:r>
-            <a:r>
-              <a:rPr lang="en-US" sz="1200" dirty="0">
-                <a:solidFill>
-                  <a:srgbClr val="94A3B8"/>
-                </a:solidFill>
-              </a:rPr>
-              <a:t>.</a:t>
-            </a:r>
-            <a:endParaRPr sz="1800" dirty="0"/>
+            <a:endParaRPr/>
           </a:p>
         </p:txBody>
       </p:sp>
       <p:sp>
         <p:nvSpPr>
-          <p:cNvPr id="101" name="Google Shape;101;p13"/>
+          <p:cNvPr id="122" name="Google Shape;122;p13"/>
           <p:cNvSpPr txBox="1"/>
           <p:nvPr/>
         </p:nvSpPr>
         <p:spPr>
           <a:xfrm>
-            <a:off x="4754880" y="5677061"/>
-            <a:ext cx="2806749" cy="886397"/>
+            <a:off x="1576887" y="2462807"/>
+            <a:ext cx="2343150" cy="308371"/>
           </a:xfrm>
           <a:prstGeom prst="rect">
             <a:avLst/>
@@ -12233,207 +12160,42 @@
           </a:bodyPr>
           <a:lstStyle/>
           <a:p>
-            <a:pPr>
+            <a:pPr marL="0" marR="0" lvl="0" indent="0" algn="l" rtl="0">
               <a:lnSpc>
-                <a:spcPct val="160000"/>
+                <a:spcPct val="134888"/>
               </a:lnSpc>
+              <a:spcBef>
+                <a:spcPts val="0"/>
+              </a:spcBef>
+              <a:spcAft>
+                <a:spcPts val="0"/>
+              </a:spcAft>
+              <a:buNone/>
             </a:pPr>
             <a:r>
-              <a:rPr lang="en-US" sz="1200" b="1" dirty="0" err="1">
-                <a:solidFill>
-                  <a:srgbClr val="34D399"/>
-                </a:solidFill>
-              </a:rPr>
-              <a:t>최종</a:t>
-            </a:r>
-            <a:r>
-              <a:rPr lang="en-US" sz="1200" b="1" dirty="0">
-                <a:solidFill>
-                  <a:srgbClr val="34D399"/>
-                </a:solidFill>
-              </a:rPr>
-              <a:t> </a:t>
-            </a:r>
-            <a:r>
-              <a:rPr lang="en-US" sz="1200" b="1" dirty="0" err="1">
-                <a:solidFill>
-                  <a:srgbClr val="34D399"/>
-                </a:solidFill>
-              </a:rPr>
-              <a:t>밀착</a:t>
-            </a:r>
-            <a:r>
-              <a:rPr lang="en-US" sz="1200" dirty="0" err="1">
+              <a:rPr lang="en-US" sz="900" b="0" i="0" u="none" strike="noStrike" cap="none">
                 <a:solidFill>
                   <a:srgbClr val="94A3B8"/>
                 </a:solidFill>
+                <a:latin typeface="Malgun Gothic"/>
+                <a:ea typeface="Malgun Gothic"/>
+                <a:cs typeface="Malgun Gothic"/>
+                <a:sym typeface="Malgun Gothic"/>
               </a:rPr>
-              <a:t>비전으로</a:t>
+              <a:t>초기 대기 후 50cm 간격을 유지하며 타겟을 부드럽게 추종</a:t>
             </a:r>
-            <a:r>
-              <a:rPr lang="en-US" sz="1200" dirty="0">
-                <a:solidFill>
-                  <a:srgbClr val="94A3B8"/>
-                </a:solidFill>
-              </a:rPr>
-              <a:t> </a:t>
-            </a:r>
-            <a:r>
-              <a:rPr lang="en-US" sz="1200" dirty="0" err="1">
-                <a:solidFill>
-                  <a:srgbClr val="94A3B8"/>
-                </a:solidFill>
-              </a:rPr>
-              <a:t>Y축을</a:t>
-            </a:r>
-            <a:r>
-              <a:rPr lang="en-US" sz="1200" dirty="0">
-                <a:solidFill>
-                  <a:srgbClr val="94A3B8"/>
-                </a:solidFill>
-              </a:rPr>
-              <a:t> </a:t>
-            </a:r>
-            <a:r>
-              <a:rPr lang="en-US" sz="1200" dirty="0" err="1">
-                <a:solidFill>
-                  <a:srgbClr val="94A3B8"/>
-                </a:solidFill>
-              </a:rPr>
-              <a:t>정밀</a:t>
-            </a:r>
-            <a:r>
-              <a:rPr lang="en-US" sz="1200" dirty="0">
-                <a:solidFill>
-                  <a:srgbClr val="94A3B8"/>
-                </a:solidFill>
-              </a:rPr>
-              <a:t> </a:t>
-            </a:r>
-            <a:r>
-              <a:rPr lang="en-US" sz="1200" dirty="0" err="1">
-                <a:solidFill>
-                  <a:srgbClr val="94A3B8"/>
-                </a:solidFill>
-              </a:rPr>
-              <a:t>보정하고</a:t>
-            </a:r>
-            <a:r>
-              <a:rPr lang="en-US" sz="1200" dirty="0">
-                <a:solidFill>
-                  <a:srgbClr val="94A3B8"/>
-                </a:solidFill>
-              </a:rPr>
-              <a:t>, </a:t>
-            </a:r>
-            <a:r>
-              <a:rPr lang="en-US" sz="1200" dirty="0" err="1">
-                <a:solidFill>
-                  <a:srgbClr val="94A3B8"/>
-                </a:solidFill>
-              </a:rPr>
-              <a:t>라이다를</a:t>
-            </a:r>
-            <a:r>
-              <a:rPr lang="en-US" sz="1200" dirty="0">
-                <a:solidFill>
-                  <a:srgbClr val="94A3B8"/>
-                </a:solidFill>
-              </a:rPr>
-              <a:t> </a:t>
-            </a:r>
-            <a:r>
-              <a:rPr lang="en-US" sz="1200" dirty="0" err="1">
-                <a:solidFill>
-                  <a:srgbClr val="94A3B8"/>
-                </a:solidFill>
-              </a:rPr>
-              <a:t>활용해</a:t>
-            </a:r>
-            <a:r>
-              <a:rPr lang="en-US" sz="1200" dirty="0">
-                <a:solidFill>
-                  <a:srgbClr val="94A3B8"/>
-                </a:solidFill>
-              </a:rPr>
-              <a:t> 22cm까지 </a:t>
-            </a:r>
-            <a:r>
-              <a:rPr lang="en-US" sz="1200" dirty="0" err="1">
-                <a:solidFill>
-                  <a:srgbClr val="94A3B8"/>
-                </a:solidFill>
-              </a:rPr>
-              <a:t>전진하여</a:t>
-            </a:r>
-            <a:r>
-              <a:rPr lang="en-US" sz="1200" dirty="0">
-                <a:solidFill>
-                  <a:srgbClr val="94A3B8"/>
-                </a:solidFill>
-              </a:rPr>
-              <a:t> </a:t>
-            </a:r>
-            <a:r>
-              <a:rPr lang="en-US" sz="1200" dirty="0" err="1">
-                <a:solidFill>
-                  <a:srgbClr val="94A3B8"/>
-                </a:solidFill>
-              </a:rPr>
-              <a:t>완벽한</a:t>
-            </a:r>
-            <a:r>
-              <a:rPr lang="en-US" sz="1200" dirty="0">
-                <a:solidFill>
-                  <a:srgbClr val="94A3B8"/>
-                </a:solidFill>
-              </a:rPr>
-              <a:t> </a:t>
-            </a:r>
-            <a:r>
-              <a:rPr lang="en-US" sz="1200" dirty="0" err="1">
-                <a:solidFill>
-                  <a:srgbClr val="94A3B8"/>
-                </a:solidFill>
-              </a:rPr>
-              <a:t>도킹을</a:t>
-            </a:r>
-            <a:r>
-              <a:rPr lang="en-US" sz="1200" dirty="0">
-                <a:solidFill>
-                  <a:srgbClr val="94A3B8"/>
-                </a:solidFill>
-              </a:rPr>
-              <a:t> </a:t>
-            </a:r>
-            <a:r>
-              <a:rPr lang="en-US" sz="1200" dirty="0" err="1">
-                <a:solidFill>
-                  <a:srgbClr val="94A3B8"/>
-                </a:solidFill>
-              </a:rPr>
-              <a:t>완료합니다</a:t>
-            </a:r>
-            <a:r>
-              <a:rPr lang="en-US" sz="1200" dirty="0">
-                <a:solidFill>
-                  <a:srgbClr val="94A3B8"/>
-                </a:solidFill>
-              </a:rPr>
-              <a:t>.</a:t>
-            </a:r>
-            <a:endParaRPr sz="1800" dirty="0"/>
+            <a:endParaRPr/>
           </a:p>
         </p:txBody>
       </p:sp>
       <p:pic>
         <p:nvPicPr>
-          <p:cNvPr id="102" name="Google Shape;102;p13" descr="image.png"/>
+          <p:cNvPr id="123" name="Google Shape;123;p13" descr="image.png"/>
           <p:cNvPicPr preferRelativeResize="0"/>
           <p:nvPr/>
         </p:nvPicPr>
         <p:blipFill rotWithShape="1">
-          <a:blip r:embed="rId11">
+          <a:blip r:embed="rId27">
             <a:alphaModFix/>
           </a:blip>
           <a:srcRect/>
@@ -12441,8 +12203,8 @@
         </p:blipFill>
         <p:spPr>
           <a:xfrm>
-            <a:off x="8470999" y="1885952"/>
-            <a:ext cx="419100" cy="366701"/>
+            <a:off x="710112" y="3370064"/>
+            <a:ext cx="742950" cy="504825"/>
           </a:xfrm>
           <a:prstGeom prst="rect">
             <a:avLst/>
@@ -12455,14 +12217,14 @@
       </p:pic>
       <p:sp>
         <p:nvSpPr>
-          <p:cNvPr id="103" name="Google Shape;103;p13"/>
+          <p:cNvPr id="124" name="Google Shape;124;p13"/>
           <p:cNvSpPr txBox="1"/>
           <p:nvPr/>
         </p:nvSpPr>
         <p:spPr>
           <a:xfrm>
-            <a:off x="8471000" y="3200400"/>
-            <a:ext cx="2806749" cy="886397"/>
+            <a:off x="1576887" y="3368278"/>
+            <a:ext cx="2460307" cy="171450"/>
           </a:xfrm>
           <a:prstGeom prst="rect">
             <a:avLst/>
@@ -12478,217 +12240,41 @@
           </a:bodyPr>
           <a:lstStyle/>
           <a:p>
-            <a:pPr>
-              <a:lnSpc>
-                <a:spcPct val="160000"/>
-              </a:lnSpc>
+            <a:pPr marL="0" marR="0" lvl="0" indent="0" algn="l" rtl="0">
+              <a:spcBef>
+                <a:spcPts val="0"/>
+              </a:spcBef>
+              <a:spcAft>
+                <a:spcPts val="0"/>
+              </a:spcAft>
+              <a:buNone/>
             </a:pPr>
             <a:r>
-              <a:rPr lang="en-US" sz="1200" b="1" dirty="0">
+              <a:rPr lang="en-US" sz="1050" b="1" i="0" u="none" strike="noStrike" cap="none">
                 <a:solidFill>
-                  <a:srgbClr val="A78BFA"/>
+                  <a:srgbClr val="FFFFFF"/>
                 </a:solidFill>
+                <a:latin typeface="Malgun Gothic"/>
+                <a:ea typeface="Malgun Gothic"/>
+                <a:cs typeface="Malgun Gothic"/>
+                <a:sym typeface="Malgun Gothic"/>
               </a:rPr>
-              <a:t>Sensor </a:t>
+              <a:t>LiDAR 긴급 회피</a:t>
             </a:r>
-            <a:r>
-              <a:rPr lang="en-US" sz="1200" b="1" dirty="0" err="1">
-                <a:solidFill>
-                  <a:srgbClr val="A78BFA"/>
-                </a:solidFill>
-              </a:rPr>
-              <a:t>Fusion</a:t>
-            </a:r>
-            <a:r>
-              <a:rPr lang="en-US" sz="1200" dirty="0" err="1">
-                <a:solidFill>
-                  <a:srgbClr val="94A3B8"/>
-                </a:solidFill>
-              </a:rPr>
-              <a:t>비전</a:t>
-            </a:r>
-            <a:r>
-              <a:rPr lang="en-US" sz="1200" dirty="0">
-                <a:solidFill>
-                  <a:srgbClr val="94A3B8"/>
-                </a:solidFill>
-              </a:rPr>
-              <a:t>(</a:t>
-            </a:r>
-            <a:r>
-              <a:rPr lang="en-US" sz="1200" dirty="0" err="1">
-                <a:solidFill>
-                  <a:srgbClr val="94A3B8"/>
-                </a:solidFill>
-              </a:rPr>
-              <a:t>방향</a:t>
-            </a:r>
-            <a:r>
-              <a:rPr lang="en-US" sz="1200" dirty="0">
-                <a:solidFill>
-                  <a:srgbClr val="94A3B8"/>
-                </a:solidFill>
-              </a:rPr>
-              <a:t>/</a:t>
-            </a:r>
-            <a:r>
-              <a:rPr lang="en-US" sz="1200" dirty="0" err="1">
-                <a:solidFill>
-                  <a:srgbClr val="94A3B8"/>
-                </a:solidFill>
-              </a:rPr>
-              <a:t>좌표</a:t>
-            </a:r>
-            <a:r>
-              <a:rPr lang="en-US" sz="1200" dirty="0">
-                <a:solidFill>
-                  <a:srgbClr val="94A3B8"/>
-                </a:solidFill>
-              </a:rPr>
-              <a:t>)과 LiDAR(</a:t>
-            </a:r>
-            <a:r>
-              <a:rPr lang="en-US" sz="1200" dirty="0" err="1">
-                <a:solidFill>
-                  <a:srgbClr val="94A3B8"/>
-                </a:solidFill>
-              </a:rPr>
-              <a:t>거리</a:t>
-            </a:r>
-            <a:r>
-              <a:rPr lang="en-US" sz="1200" dirty="0">
-                <a:solidFill>
-                  <a:srgbClr val="94A3B8"/>
-                </a:solidFill>
-              </a:rPr>
-              <a:t>/</a:t>
-            </a:r>
-            <a:r>
-              <a:rPr lang="en-US" sz="1200" dirty="0" err="1">
-                <a:solidFill>
-                  <a:srgbClr val="94A3B8"/>
-                </a:solidFill>
-              </a:rPr>
-              <a:t>장애물</a:t>
-            </a:r>
-            <a:r>
-              <a:rPr lang="en-US" sz="1200" dirty="0">
-                <a:solidFill>
-                  <a:srgbClr val="94A3B8"/>
-                </a:solidFill>
-              </a:rPr>
-              <a:t>)의 </a:t>
-            </a:r>
-            <a:r>
-              <a:rPr lang="en-US" sz="1200" dirty="0" err="1">
-                <a:solidFill>
-                  <a:srgbClr val="94A3B8"/>
-                </a:solidFill>
-              </a:rPr>
-              <a:t>장점을</a:t>
-            </a:r>
-            <a:r>
-              <a:rPr lang="en-US" sz="1200" dirty="0">
-                <a:solidFill>
-                  <a:srgbClr val="94A3B8"/>
-                </a:solidFill>
-              </a:rPr>
-              <a:t> </a:t>
-            </a:r>
-            <a:r>
-              <a:rPr lang="en-US" sz="1200" dirty="0" err="1">
-                <a:solidFill>
-                  <a:srgbClr val="94A3B8"/>
-                </a:solidFill>
-              </a:rPr>
-              <a:t>결합하여</a:t>
-            </a:r>
-            <a:r>
-              <a:rPr lang="en-US" sz="1200" dirty="0">
-                <a:solidFill>
-                  <a:srgbClr val="94A3B8"/>
-                </a:solidFill>
-              </a:rPr>
-              <a:t> </a:t>
-            </a:r>
-            <a:r>
-              <a:rPr lang="en-US" sz="1200" dirty="0" err="1">
-                <a:solidFill>
-                  <a:srgbClr val="94A3B8"/>
-                </a:solidFill>
-              </a:rPr>
-              <a:t>동적</a:t>
-            </a:r>
-            <a:r>
-              <a:rPr lang="en-US" sz="1200" dirty="0">
-                <a:solidFill>
-                  <a:srgbClr val="94A3B8"/>
-                </a:solidFill>
-              </a:rPr>
-              <a:t> </a:t>
-            </a:r>
-            <a:r>
-              <a:rPr lang="en-US" sz="1200" dirty="0" err="1">
-                <a:solidFill>
-                  <a:srgbClr val="94A3B8"/>
-                </a:solidFill>
-              </a:rPr>
-              <a:t>환경에서의</a:t>
-            </a:r>
-            <a:r>
-              <a:rPr lang="en-US" sz="1200" dirty="0">
-                <a:solidFill>
-                  <a:srgbClr val="94A3B8"/>
-                </a:solidFill>
-              </a:rPr>
-              <a:t> </a:t>
-            </a:r>
-            <a:r>
-              <a:rPr lang="en-US" sz="1200" dirty="0" err="1">
-                <a:solidFill>
-                  <a:srgbClr val="94A3B8"/>
-                </a:solidFill>
-              </a:rPr>
-              <a:t>생존력을</a:t>
-            </a:r>
-            <a:r>
-              <a:rPr lang="en-US" sz="1200" dirty="0">
-                <a:solidFill>
-                  <a:srgbClr val="94A3B8"/>
-                </a:solidFill>
-              </a:rPr>
-              <a:t> </a:t>
-            </a:r>
-            <a:r>
-              <a:rPr lang="en-US" sz="1200" dirty="0" err="1">
-                <a:solidFill>
-                  <a:srgbClr val="94A3B8"/>
-                </a:solidFill>
-              </a:rPr>
-              <a:t>확보합니다</a:t>
-            </a:r>
-            <a:r>
-              <a:rPr lang="en-US" sz="1200" dirty="0">
-                <a:solidFill>
-                  <a:srgbClr val="94A3B8"/>
-                </a:solidFill>
-              </a:rPr>
-              <a:t>.</a:t>
-            </a:r>
-            <a:endParaRPr sz="1800" dirty="0"/>
+            <a:endParaRPr/>
           </a:p>
         </p:txBody>
       </p:sp>
       <p:sp>
         <p:nvSpPr>
-          <p:cNvPr id="104" name="Google Shape;104;p13"/>
+          <p:cNvPr id="125" name="Google Shape;125;p13"/>
           <p:cNvSpPr txBox="1"/>
           <p:nvPr/>
         </p:nvSpPr>
         <p:spPr>
           <a:xfrm>
-            <a:off x="8471000" y="4401311"/>
-            <a:ext cx="2806749" cy="886397"/>
+            <a:off x="1576887" y="3568303"/>
+            <a:ext cx="2343150" cy="308371"/>
           </a:xfrm>
           <a:prstGeom prst="rect">
             <a:avLst/>
@@ -12704,225 +12290,239 @@
           </a:bodyPr>
           <a:lstStyle/>
           <a:p>
-            <a:pPr>
+            <a:pPr marL="0" marR="0" lvl="0" indent="0" algn="l" rtl="0">
               <a:lnSpc>
-                <a:spcPct val="160000"/>
+                <a:spcPct val="134888"/>
               </a:lnSpc>
+              <a:spcBef>
+                <a:spcPts val="0"/>
+              </a:spcBef>
+              <a:spcAft>
+                <a:spcPts val="0"/>
+              </a:spcAft>
+              <a:buNone/>
             </a:pPr>
             <a:r>
-              <a:rPr lang="en-US" sz="1200" b="1" dirty="0" err="1">
+              <a:rPr lang="en-US" sz="900" b="0" i="0" u="none" strike="noStrike" cap="none" dirty="0" err="1">
                 <a:solidFill>
-                  <a:srgbClr val="A78BFA"/>
+                  <a:srgbClr val="94A3B8"/>
                 </a:solidFill>
+                <a:latin typeface="Malgun Gothic"/>
+                <a:ea typeface="Malgun Gothic"/>
+                <a:cs typeface="Malgun Gothic"/>
+                <a:sym typeface="Malgun Gothic"/>
               </a:rPr>
-              <a:t>노이즈</a:t>
+              <a:t>전방</a:t>
             </a:r>
             <a:r>
-              <a:rPr lang="en-US" sz="1200" b="1" dirty="0">
+              <a:rPr lang="en-US" sz="900" b="0" i="0" u="none" strike="noStrike" cap="none" dirty="0">
                 <a:solidFill>
-                  <a:srgbClr val="A78BFA"/>
+                  <a:srgbClr val="94A3B8"/>
                 </a:solidFill>
+                <a:latin typeface="Malgun Gothic"/>
+                <a:ea typeface="Malgun Gothic"/>
+                <a:cs typeface="Malgun Gothic"/>
+                <a:sym typeface="Malgun Gothic"/>
+              </a:rPr>
+              <a:t> 35cm </a:t>
+            </a:r>
+            <a:r>
+              <a:rPr lang="en-US" sz="900" b="0" i="0" u="none" strike="noStrike" cap="none" dirty="0" err="1">
+                <a:solidFill>
+                  <a:srgbClr val="94A3B8"/>
+                </a:solidFill>
+                <a:latin typeface="Malgun Gothic"/>
+                <a:ea typeface="Malgun Gothic"/>
+                <a:cs typeface="Malgun Gothic"/>
+                <a:sym typeface="Malgun Gothic"/>
+              </a:rPr>
+              <a:t>장애물</a:t>
+            </a:r>
+            <a:r>
+              <a:rPr lang="en-US" sz="900" b="0" i="0" u="none" strike="noStrike" cap="none" dirty="0">
+                <a:solidFill>
+                  <a:srgbClr val="94A3B8"/>
+                </a:solidFill>
+                <a:latin typeface="Malgun Gothic"/>
+                <a:ea typeface="Malgun Gothic"/>
+                <a:cs typeface="Malgun Gothic"/>
+                <a:sym typeface="Malgun Gothic"/>
               </a:rPr>
               <a:t> </a:t>
             </a:r>
             <a:r>
-              <a:rPr lang="en-US" sz="1200" b="1" dirty="0" err="1">
-                <a:solidFill>
-                  <a:srgbClr val="A78BFA"/>
-                </a:solidFill>
-              </a:rPr>
-              <a:t>필터링</a:t>
-            </a:r>
-            <a:r>
-              <a:rPr lang="en-US" sz="1200" dirty="0" err="1">
+              <a:rPr lang="en-US" sz="900" b="0" i="0" u="none" strike="noStrike" cap="none" dirty="0" err="1">
                 <a:solidFill>
                   <a:srgbClr val="94A3B8"/>
                 </a:solidFill>
+                <a:latin typeface="Malgun Gothic"/>
+                <a:ea typeface="Malgun Gothic"/>
+                <a:cs typeface="Malgun Gothic"/>
+                <a:sym typeface="Malgun Gothic"/>
               </a:rPr>
-              <a:t>Deadband로</a:t>
+              <a:t>감지</a:t>
             </a:r>
             <a:r>
-              <a:rPr lang="en-US" sz="1200" dirty="0">
+              <a:rPr lang="en-US" sz="900" b="0" i="0" u="none" strike="noStrike" cap="none" dirty="0">
                 <a:solidFill>
                   <a:srgbClr val="94A3B8"/>
                 </a:solidFill>
+                <a:latin typeface="Malgun Gothic"/>
+                <a:ea typeface="Malgun Gothic"/>
+                <a:cs typeface="Malgun Gothic"/>
+                <a:sym typeface="Malgun Gothic"/>
+              </a:rPr>
+              <a:t> 시 </a:t>
+            </a:r>
+            <a:r>
+              <a:rPr lang="en-US" sz="900" b="0" i="0" u="none" strike="noStrike" cap="none" dirty="0" err="1">
+                <a:solidFill>
+                  <a:srgbClr val="94A3B8"/>
+                </a:solidFill>
+                <a:latin typeface="Malgun Gothic"/>
+                <a:ea typeface="Malgun Gothic"/>
+                <a:cs typeface="Malgun Gothic"/>
+                <a:sym typeface="Malgun Gothic"/>
+              </a:rPr>
+              <a:t>즉각</a:t>
+            </a:r>
+            <a:r>
+              <a:rPr lang="en-US" sz="900" b="0" i="0" u="none" strike="noStrike" cap="none" dirty="0">
+                <a:solidFill>
+                  <a:srgbClr val="94A3B8"/>
+                </a:solidFill>
+                <a:latin typeface="Malgun Gothic"/>
+                <a:ea typeface="Malgun Gothic"/>
+                <a:cs typeface="Malgun Gothic"/>
+                <a:sym typeface="Malgun Gothic"/>
               </a:rPr>
               <a:t> </a:t>
             </a:r>
             <a:r>
-              <a:rPr lang="en-US" sz="1200" dirty="0" err="1">
+              <a:rPr lang="en-US" sz="900" b="0" i="0" u="none" strike="noStrike" cap="none" dirty="0" err="1">
                 <a:solidFill>
                   <a:srgbClr val="94A3B8"/>
                 </a:solidFill>
+                <a:latin typeface="Malgun Gothic"/>
+                <a:ea typeface="Malgun Gothic"/>
+                <a:cs typeface="Malgun Gothic"/>
+                <a:sym typeface="Malgun Gothic"/>
               </a:rPr>
-              <a:t>가짜</a:t>
+              <a:t>추종</a:t>
             </a:r>
             <a:r>
-              <a:rPr lang="en-US" sz="1200" dirty="0">
+              <a:rPr lang="en-US" sz="900" b="0" i="0" u="none" strike="noStrike" cap="none" dirty="0">
                 <a:solidFill>
                   <a:srgbClr val="94A3B8"/>
                 </a:solidFill>
+                <a:latin typeface="Malgun Gothic"/>
+                <a:ea typeface="Malgun Gothic"/>
+                <a:cs typeface="Malgun Gothic"/>
+                <a:sym typeface="Malgun Gothic"/>
               </a:rPr>
               <a:t> </a:t>
             </a:r>
             <a:r>
-              <a:rPr lang="en-US" sz="1200" dirty="0" err="1">
+              <a:rPr lang="en-US" sz="900" b="0" i="0" u="none" strike="noStrike" cap="none" dirty="0" err="1">
                 <a:solidFill>
                   <a:srgbClr val="94A3B8"/>
                 </a:solidFill>
+                <a:latin typeface="Malgun Gothic"/>
+                <a:ea typeface="Malgun Gothic"/>
+                <a:cs typeface="Malgun Gothic"/>
+                <a:sym typeface="Malgun Gothic"/>
               </a:rPr>
-              <a:t>데이터</a:t>
+              <a:t>정지</a:t>
             </a:r>
             <a:r>
-              <a:rPr lang="en-US" sz="1200" dirty="0">
+              <a:rPr lang="en-US" sz="900" b="0" i="0" u="none" strike="noStrike" cap="none" dirty="0">
                 <a:solidFill>
                   <a:srgbClr val="94A3B8"/>
                 </a:solidFill>
+                <a:latin typeface="Malgun Gothic"/>
+                <a:ea typeface="Malgun Gothic"/>
+                <a:cs typeface="Malgun Gothic"/>
+                <a:sym typeface="Malgun Gothic"/>
+              </a:rPr>
+              <a:t> 및 </a:t>
+            </a:r>
+            <a:r>
+              <a:rPr lang="en-US" sz="900" b="0" i="0" u="none" strike="noStrike" cap="none" dirty="0" err="1">
+                <a:solidFill>
+                  <a:srgbClr val="94A3B8"/>
+                </a:solidFill>
+                <a:latin typeface="Malgun Gothic"/>
+                <a:ea typeface="Malgun Gothic"/>
+                <a:cs typeface="Malgun Gothic"/>
+                <a:sym typeface="Malgun Gothic"/>
+              </a:rPr>
+              <a:t>회피</a:t>
+            </a:r>
+            <a:r>
+              <a:rPr lang="en-US" sz="900" b="0" i="0" u="none" strike="noStrike" cap="none" dirty="0">
+                <a:solidFill>
+                  <a:srgbClr val="94A3B8"/>
+                </a:solidFill>
+                <a:latin typeface="Malgun Gothic"/>
+                <a:ea typeface="Malgun Gothic"/>
+                <a:cs typeface="Malgun Gothic"/>
+                <a:sym typeface="Malgun Gothic"/>
               </a:rPr>
               <a:t> </a:t>
             </a:r>
             <a:r>
-              <a:rPr lang="en-US" sz="1200" dirty="0" err="1">
+              <a:rPr lang="en-US" sz="900" b="0" i="0" u="none" strike="noStrike" cap="none" dirty="0" err="1">
                 <a:solidFill>
                   <a:srgbClr val="94A3B8"/>
                 </a:solidFill>
+                <a:latin typeface="Malgun Gothic"/>
+                <a:ea typeface="Malgun Gothic"/>
+                <a:cs typeface="Malgun Gothic"/>
+                <a:sym typeface="Malgun Gothic"/>
               </a:rPr>
-              <a:t>급발진을</a:t>
+              <a:t>기동</a:t>
             </a:r>
-            <a:r>
-              <a:rPr lang="en-US" sz="1200" dirty="0">
-                <a:solidFill>
-                  <a:srgbClr val="94A3B8"/>
-                </a:solidFill>
-              </a:rPr>
-              <a:t> </a:t>
-            </a:r>
-            <a:r>
-              <a:rPr lang="en-US" sz="1200" dirty="0" err="1">
-                <a:solidFill>
-                  <a:srgbClr val="94A3B8"/>
-                </a:solidFill>
-              </a:rPr>
-              <a:t>막고</a:t>
-            </a:r>
-            <a:r>
-              <a:rPr lang="en-US" sz="1200" dirty="0">
-                <a:solidFill>
-                  <a:srgbClr val="94A3B8"/>
-                </a:solidFill>
-              </a:rPr>
-              <a:t>, Watchdog </a:t>
-            </a:r>
-            <a:r>
-              <a:rPr lang="en-US" sz="1200" dirty="0" err="1">
-                <a:solidFill>
-                  <a:srgbClr val="94A3B8"/>
-                </a:solidFill>
-              </a:rPr>
-              <a:t>타이머로</a:t>
-            </a:r>
-            <a:r>
-              <a:rPr lang="en-US" sz="1200" dirty="0">
-                <a:solidFill>
-                  <a:srgbClr val="94A3B8"/>
-                </a:solidFill>
-              </a:rPr>
-              <a:t> </a:t>
-            </a:r>
-            <a:r>
-              <a:rPr lang="en-US" sz="1200" dirty="0" err="1">
-                <a:solidFill>
-                  <a:srgbClr val="94A3B8"/>
-                </a:solidFill>
-              </a:rPr>
-              <a:t>통신</a:t>
-            </a:r>
-            <a:r>
-              <a:rPr lang="en-US" sz="1200" dirty="0">
-                <a:solidFill>
-                  <a:srgbClr val="94A3B8"/>
-                </a:solidFill>
-              </a:rPr>
-              <a:t> </a:t>
-            </a:r>
-            <a:r>
-              <a:rPr lang="en-US" sz="1200" dirty="0" err="1">
-                <a:solidFill>
-                  <a:srgbClr val="94A3B8"/>
-                </a:solidFill>
-              </a:rPr>
-              <a:t>단절</a:t>
-            </a:r>
-            <a:r>
-              <a:rPr lang="en-US" sz="1200" dirty="0">
-                <a:solidFill>
-                  <a:srgbClr val="94A3B8"/>
-                </a:solidFill>
-              </a:rPr>
-              <a:t> 시 </a:t>
-            </a:r>
-            <a:r>
-              <a:rPr lang="en-US" sz="1200" dirty="0" err="1">
-                <a:solidFill>
-                  <a:srgbClr val="94A3B8"/>
-                </a:solidFill>
-              </a:rPr>
-              <a:t>자율</a:t>
-            </a:r>
-            <a:r>
-              <a:rPr lang="en-US" sz="1200" dirty="0">
-                <a:solidFill>
-                  <a:srgbClr val="94A3B8"/>
-                </a:solidFill>
-              </a:rPr>
-              <a:t> </a:t>
-            </a:r>
-            <a:r>
-              <a:rPr lang="en-US" sz="1200" dirty="0" err="1">
-                <a:solidFill>
-                  <a:srgbClr val="94A3B8"/>
-                </a:solidFill>
-              </a:rPr>
-              <a:t>판단을</a:t>
-            </a:r>
-            <a:r>
-              <a:rPr lang="en-US" sz="1200" dirty="0">
-                <a:solidFill>
-                  <a:srgbClr val="94A3B8"/>
-                </a:solidFill>
-              </a:rPr>
-              <a:t> </a:t>
-            </a:r>
-            <a:r>
-              <a:rPr lang="en-US" sz="1200" dirty="0" err="1">
-                <a:solidFill>
-                  <a:srgbClr val="94A3B8"/>
-                </a:solidFill>
-              </a:rPr>
-              <a:t>구현합니다</a:t>
-            </a:r>
-            <a:r>
-              <a:rPr lang="en-US" sz="1200" dirty="0">
-                <a:solidFill>
-                  <a:srgbClr val="94A3B8"/>
-                </a:solidFill>
-              </a:rPr>
-              <a:t>.</a:t>
-            </a:r>
-            <a:endParaRPr sz="1800" dirty="0"/>
+            <a:endParaRPr dirty="0"/>
           </a:p>
         </p:txBody>
       </p:sp>
+      <p:pic>
+        <p:nvPicPr>
+          <p:cNvPr id="126" name="Google Shape;126;p13" descr="image.png"/>
+          <p:cNvPicPr preferRelativeResize="0"/>
+          <p:nvPr/>
+        </p:nvPicPr>
+        <p:blipFill rotWithShape="1">
+          <a:blip r:embed="rId28">
+            <a:alphaModFix/>
+          </a:blip>
+          <a:srcRect/>
+          <a:stretch/>
+        </p:blipFill>
+        <p:spPr>
+          <a:xfrm>
+            <a:off x="710112" y="4475559"/>
+            <a:ext cx="742950" cy="504825"/>
+          </a:xfrm>
+          <a:prstGeom prst="rect">
+            <a:avLst/>
+          </a:prstGeom>
+          <a:noFill/>
+          <a:ln>
+            <a:noFill/>
+          </a:ln>
+        </p:spPr>
+      </p:pic>
       <p:sp>
         <p:nvSpPr>
-          <p:cNvPr id="105" name="Google Shape;105;p13"/>
+          <p:cNvPr id="127" name="Google Shape;127;p13"/>
           <p:cNvSpPr txBox="1"/>
           <p:nvPr/>
         </p:nvSpPr>
         <p:spPr>
           <a:xfrm>
-            <a:off x="8471000" y="5697517"/>
-            <a:ext cx="2806749" cy="886397"/>
+            <a:off x="1576887" y="4473773"/>
+            <a:ext cx="2460307" cy="171450"/>
           </a:xfrm>
           <a:prstGeom prst="rect">
             <a:avLst/>
@@ -12938,249 +12538,1009 @@
           </a:bodyPr>
           <a:lstStyle/>
           <a:p>
-            <a:pPr>
-              <a:lnSpc>
-                <a:spcPct val="160000"/>
-              </a:lnSpc>
+            <a:pPr marL="0" marR="0" lvl="0" indent="0" algn="l" rtl="0">
+              <a:spcBef>
+                <a:spcPts val="0"/>
+              </a:spcBef>
+              <a:spcAft>
+                <a:spcPts val="0"/>
+              </a:spcAft>
+              <a:buNone/>
             </a:pPr>
             <a:r>
-              <a:rPr lang="en-US" sz="1200" b="1" dirty="0" err="1">
+              <a:rPr lang="en-US" sz="1050" b="1" i="0" u="none" strike="noStrike" cap="none">
                 <a:solidFill>
-                  <a:srgbClr val="A78BFA"/>
+                  <a:srgbClr val="FFFFFF"/>
                 </a:solidFill>
+                <a:latin typeface="Malgun Gothic"/>
+                <a:ea typeface="Malgun Gothic"/>
+                <a:cs typeface="Malgun Gothic"/>
+                <a:sym typeface="Malgun Gothic"/>
               </a:rPr>
-              <a:t>순차</a:t>
+              <a:t>와치독 유실 복구</a:t>
             </a:r>
-            <a:r>
-              <a:rPr lang="en-US" sz="1200" b="1" dirty="0">
-                <a:solidFill>
-                  <a:srgbClr val="A78BFA"/>
-                </a:solidFill>
-              </a:rPr>
-              <a:t> </a:t>
-            </a:r>
-            <a:r>
-              <a:rPr lang="en-US" sz="1200" b="1" dirty="0" err="1">
-                <a:solidFill>
-                  <a:srgbClr val="A78BFA"/>
-                </a:solidFill>
-              </a:rPr>
-              <a:t>제어</a:t>
-            </a:r>
-            <a:r>
-              <a:rPr lang="en-US" sz="1200" b="1" dirty="0">
-                <a:solidFill>
-                  <a:srgbClr val="A78BFA"/>
-                </a:solidFill>
-              </a:rPr>
-              <a:t> (Sequential)</a:t>
-            </a:r>
-            <a:r>
-              <a:rPr lang="en-US" sz="1200" dirty="0" err="1">
-                <a:solidFill>
-                  <a:srgbClr val="94A3B8"/>
-                </a:solidFill>
-              </a:rPr>
-              <a:t>대각선</a:t>
-            </a:r>
-            <a:r>
-              <a:rPr lang="en-US" sz="1200" dirty="0">
-                <a:solidFill>
-                  <a:srgbClr val="94A3B8"/>
-                </a:solidFill>
-              </a:rPr>
-              <a:t> </a:t>
-            </a:r>
-            <a:r>
-              <a:rPr lang="en-US" sz="1200" dirty="0" err="1">
-                <a:solidFill>
-                  <a:srgbClr val="94A3B8"/>
-                </a:solidFill>
-              </a:rPr>
-              <a:t>기동</a:t>
-            </a:r>
-            <a:r>
-              <a:rPr lang="en-US" sz="1200" dirty="0">
-                <a:solidFill>
-                  <a:srgbClr val="94A3B8"/>
-                </a:solidFill>
-              </a:rPr>
-              <a:t> 시 </a:t>
-            </a:r>
-            <a:r>
-              <a:rPr lang="en-US" sz="1200" dirty="0" err="1">
-                <a:solidFill>
-                  <a:srgbClr val="94A3B8"/>
-                </a:solidFill>
-              </a:rPr>
-              <a:t>모터</a:t>
-            </a:r>
-            <a:r>
-              <a:rPr lang="en-US" sz="1200" dirty="0">
-                <a:solidFill>
-                  <a:srgbClr val="94A3B8"/>
-                </a:solidFill>
-              </a:rPr>
-              <a:t> </a:t>
-            </a:r>
-            <a:r>
-              <a:rPr lang="en-US" sz="1200" dirty="0" err="1">
-                <a:solidFill>
-                  <a:srgbClr val="94A3B8"/>
-                </a:solidFill>
-              </a:rPr>
-              <a:t>헛돔</a:t>
-            </a:r>
-            <a:r>
-              <a:rPr lang="en-US" sz="1200" dirty="0">
-                <a:solidFill>
-                  <a:srgbClr val="94A3B8"/>
-                </a:solidFill>
-              </a:rPr>
-              <a:t> </a:t>
-            </a:r>
-            <a:r>
-              <a:rPr lang="en-US" sz="1200" dirty="0" err="1">
-                <a:solidFill>
-                  <a:srgbClr val="94A3B8"/>
-                </a:solidFill>
-              </a:rPr>
-              <a:t>현상을</a:t>
-            </a:r>
-            <a:r>
-              <a:rPr lang="en-US" sz="1200" dirty="0">
-                <a:solidFill>
-                  <a:srgbClr val="94A3B8"/>
-                </a:solidFill>
-              </a:rPr>
-              <a:t> </a:t>
-            </a:r>
-            <a:r>
-              <a:rPr lang="en-US" sz="1200" dirty="0" err="1">
-                <a:solidFill>
-                  <a:srgbClr val="94A3B8"/>
-                </a:solidFill>
-              </a:rPr>
-              <a:t>막기</a:t>
-            </a:r>
-            <a:r>
-              <a:rPr lang="en-US" sz="1200" dirty="0">
-                <a:solidFill>
-                  <a:srgbClr val="94A3B8"/>
-                </a:solidFill>
-              </a:rPr>
-              <a:t> </a:t>
-            </a:r>
-            <a:r>
-              <a:rPr lang="en-US" sz="1200" dirty="0" err="1">
-                <a:solidFill>
-                  <a:srgbClr val="94A3B8"/>
-                </a:solidFill>
-              </a:rPr>
-              <a:t>위해</a:t>
-            </a:r>
-            <a:r>
-              <a:rPr lang="en-US" sz="1200" dirty="0">
-                <a:solidFill>
-                  <a:srgbClr val="94A3B8"/>
-                </a:solidFill>
-              </a:rPr>
-              <a:t> </a:t>
-            </a:r>
-            <a:r>
-              <a:rPr lang="en-US" sz="1200" dirty="0" err="1">
-                <a:solidFill>
-                  <a:srgbClr val="94A3B8"/>
-                </a:solidFill>
-              </a:rPr>
-              <a:t>회전과</a:t>
-            </a:r>
-            <a:r>
-              <a:rPr lang="en-US" sz="1200" dirty="0">
-                <a:solidFill>
-                  <a:srgbClr val="94A3B8"/>
-                </a:solidFill>
-              </a:rPr>
-              <a:t> </a:t>
-            </a:r>
-            <a:r>
-              <a:rPr lang="en-US" sz="1200" dirty="0" err="1">
-                <a:solidFill>
-                  <a:srgbClr val="94A3B8"/>
-                </a:solidFill>
-              </a:rPr>
-              <a:t>직진을</a:t>
-            </a:r>
-            <a:r>
-              <a:rPr lang="en-US" sz="1200" dirty="0">
-                <a:solidFill>
-                  <a:srgbClr val="94A3B8"/>
-                </a:solidFill>
-              </a:rPr>
-              <a:t> </a:t>
-            </a:r>
-            <a:r>
-              <a:rPr lang="en-US" sz="1200" dirty="0" err="1">
-                <a:solidFill>
-                  <a:srgbClr val="94A3B8"/>
-                </a:solidFill>
-              </a:rPr>
-              <a:t>분리하여</a:t>
-            </a:r>
-            <a:r>
-              <a:rPr lang="en-US" sz="1200" dirty="0">
-                <a:solidFill>
-                  <a:srgbClr val="94A3B8"/>
-                </a:solidFill>
-              </a:rPr>
-              <a:t> </a:t>
-            </a:r>
-            <a:r>
-              <a:rPr lang="en-US" sz="1200" dirty="0" err="1">
-                <a:solidFill>
-                  <a:srgbClr val="94A3B8"/>
-                </a:solidFill>
-              </a:rPr>
-              <a:t>힘을</a:t>
-            </a:r>
-            <a:r>
-              <a:rPr lang="en-US" sz="1200" dirty="0">
-                <a:solidFill>
-                  <a:srgbClr val="94A3B8"/>
-                </a:solidFill>
-              </a:rPr>
-              <a:t> 100% </a:t>
-            </a:r>
-            <a:r>
-              <a:rPr lang="en-US" sz="1200" dirty="0" err="1">
-                <a:solidFill>
-                  <a:srgbClr val="94A3B8"/>
-                </a:solidFill>
-              </a:rPr>
-              <a:t>집중시킵니다</a:t>
-            </a:r>
-            <a:r>
-              <a:rPr lang="en-US" sz="1200" dirty="0">
-                <a:solidFill>
-                  <a:srgbClr val="94A3B8"/>
-                </a:solidFill>
-              </a:rPr>
-              <a:t>.</a:t>
-            </a:r>
-            <a:endParaRPr sz="1800" dirty="0"/>
+            <a:endParaRPr/>
           </a:p>
         </p:txBody>
       </p:sp>
       <p:sp>
         <p:nvSpPr>
-          <p:cNvPr id="24" name="Shape 3"/>
+          <p:cNvPr id="128" name="Google Shape;128;p13"/>
+          <p:cNvSpPr txBox="1"/>
+          <p:nvPr/>
+        </p:nvSpPr>
+        <p:spPr>
+          <a:xfrm>
+            <a:off x="1576887" y="4673798"/>
+            <a:ext cx="2343150" cy="308371"/>
+          </a:xfrm>
+          <a:prstGeom prst="rect">
+            <a:avLst/>
+          </a:prstGeom>
+          <a:noFill/>
+          <a:ln>
+            <a:noFill/>
+          </a:ln>
+        </p:spPr>
+        <p:txBody>
+          <a:bodyPr spcFirstLastPara="1" wrap="square" lIns="0" tIns="0" rIns="0" bIns="0" anchor="t" anchorCtr="0">
+            <a:spAutoFit/>
+          </a:bodyPr>
+          <a:lstStyle/>
+          <a:p>
+            <a:pPr marL="0" marR="0" lvl="0" indent="0" algn="l" rtl="0">
+              <a:lnSpc>
+                <a:spcPct val="134888"/>
+              </a:lnSpc>
+              <a:spcBef>
+                <a:spcPts val="0"/>
+              </a:spcBef>
+              <a:spcAft>
+                <a:spcPts val="0"/>
+              </a:spcAft>
+              <a:buNone/>
+            </a:pPr>
+            <a:r>
+              <a:rPr lang="en-US" sz="900" b="0" i="0" u="none" strike="noStrike" cap="none">
+                <a:solidFill>
+                  <a:srgbClr val="94A3B8"/>
+                </a:solidFill>
+                <a:latin typeface="Malgun Gothic"/>
+                <a:ea typeface="Malgun Gothic"/>
+                <a:cs typeface="Malgun Gothic"/>
+                <a:sym typeface="Malgun Gothic"/>
+              </a:rPr>
+              <a:t>유실 시 마지막 기억 방향으로 회전하여 타겟 무한 탐색</a:t>
+            </a:r>
+            <a:endParaRPr/>
+          </a:p>
+        </p:txBody>
+      </p:sp>
+      <p:pic>
+        <p:nvPicPr>
+          <p:cNvPr id="129" name="Google Shape;129;p13" descr="image.png"/>
+          <p:cNvPicPr preferRelativeResize="0"/>
+          <p:nvPr/>
+        </p:nvPicPr>
+        <p:blipFill rotWithShape="1">
+          <a:blip r:embed="rId29">
+            <a:alphaModFix/>
+          </a:blip>
+          <a:srcRect/>
+          <a:stretch/>
+        </p:blipFill>
+        <p:spPr>
+          <a:xfrm>
+            <a:off x="710112" y="5581054"/>
+            <a:ext cx="742950" cy="504825"/>
+          </a:xfrm>
+          <a:prstGeom prst="rect">
+            <a:avLst/>
+          </a:prstGeom>
+          <a:noFill/>
+          <a:ln>
+            <a:noFill/>
+          </a:ln>
+        </p:spPr>
+      </p:pic>
+      <p:sp>
+        <p:nvSpPr>
+          <p:cNvPr id="130" name="Google Shape;130;p13"/>
+          <p:cNvSpPr txBox="1"/>
+          <p:nvPr/>
+        </p:nvSpPr>
+        <p:spPr>
+          <a:xfrm>
+            <a:off x="1576887" y="5579268"/>
+            <a:ext cx="2460307" cy="171450"/>
+          </a:xfrm>
+          <a:prstGeom prst="rect">
+            <a:avLst/>
+          </a:prstGeom>
+          <a:noFill/>
+          <a:ln>
+            <a:noFill/>
+          </a:ln>
+        </p:spPr>
+        <p:txBody>
+          <a:bodyPr spcFirstLastPara="1" wrap="square" lIns="0" tIns="0" rIns="0" bIns="0" anchor="t" anchorCtr="0">
+            <a:spAutoFit/>
+          </a:bodyPr>
+          <a:lstStyle/>
+          <a:p>
+            <a:pPr marL="0" marR="0" lvl="0" indent="0" algn="l" rtl="0">
+              <a:spcBef>
+                <a:spcPts val="0"/>
+              </a:spcBef>
+              <a:spcAft>
+                <a:spcPts val="0"/>
+              </a:spcAft>
+              <a:buNone/>
+            </a:pPr>
+            <a:r>
+              <a:rPr lang="en-US" sz="1050" b="1" i="0" u="none" strike="noStrike" cap="none">
+                <a:solidFill>
+                  <a:srgbClr val="FFFFFF"/>
+                </a:solidFill>
+                <a:latin typeface="Malgun Gothic"/>
+                <a:ea typeface="Malgun Gothic"/>
+                <a:cs typeface="Malgun Gothic"/>
+                <a:sym typeface="Malgun Gothic"/>
+              </a:rPr>
+              <a:t>모드 전환 신호</a:t>
+            </a:r>
+            <a:endParaRPr/>
+          </a:p>
+        </p:txBody>
+      </p:sp>
+      <p:sp>
+        <p:nvSpPr>
+          <p:cNvPr id="131" name="Google Shape;131;p13"/>
+          <p:cNvSpPr txBox="1"/>
+          <p:nvPr/>
+        </p:nvSpPr>
+        <p:spPr>
+          <a:xfrm>
+            <a:off x="1576887" y="5779293"/>
+            <a:ext cx="2343150" cy="308371"/>
+          </a:xfrm>
+          <a:prstGeom prst="rect">
+            <a:avLst/>
+          </a:prstGeom>
+          <a:noFill/>
+          <a:ln>
+            <a:noFill/>
+          </a:ln>
+        </p:spPr>
+        <p:txBody>
+          <a:bodyPr spcFirstLastPara="1" wrap="square" lIns="0" tIns="0" rIns="0" bIns="0" anchor="t" anchorCtr="0">
+            <a:spAutoFit/>
+          </a:bodyPr>
+          <a:lstStyle/>
+          <a:p>
+            <a:pPr marL="0" marR="0" lvl="0" indent="0" algn="l" rtl="0">
+              <a:lnSpc>
+                <a:spcPct val="134888"/>
+              </a:lnSpc>
+              <a:spcBef>
+                <a:spcPts val="0"/>
+              </a:spcBef>
+              <a:spcAft>
+                <a:spcPts val="0"/>
+              </a:spcAft>
+              <a:buNone/>
+            </a:pPr>
+            <a:r>
+              <a:rPr lang="en-US" sz="900" b="0" i="0" u="none" strike="noStrike" cap="none">
+                <a:solidFill>
+                  <a:srgbClr val="94A3B8"/>
+                </a:solidFill>
+                <a:latin typeface="Malgun Gothic"/>
+                <a:ea typeface="Malgun Gothic"/>
+                <a:cs typeface="Malgun Gothic"/>
+                <a:sym typeface="Malgun Gothic"/>
+              </a:rPr>
+              <a:t>타겟 발견 신호를 수신하면 즉시 정밀 도킹 단계로 전환</a:t>
+            </a:r>
+            <a:endParaRPr/>
+          </a:p>
+        </p:txBody>
+      </p:sp>
+      <p:pic>
+        <p:nvPicPr>
+          <p:cNvPr id="132" name="Google Shape;132;p13" descr="image.png"/>
+          <p:cNvPicPr preferRelativeResize="0"/>
+          <p:nvPr/>
+        </p:nvPicPr>
+        <p:blipFill rotWithShape="1">
+          <a:blip r:embed="rId30">
+            <a:alphaModFix/>
+          </a:blip>
+          <a:srcRect/>
+          <a:stretch/>
+        </p:blipFill>
+        <p:spPr>
+          <a:xfrm>
+            <a:off x="5381529" y="3255168"/>
+            <a:ext cx="525214" cy="152400"/>
+          </a:xfrm>
+          <a:prstGeom prst="rect">
+            <a:avLst/>
+          </a:prstGeom>
+          <a:noFill/>
+          <a:ln>
+            <a:noFill/>
+          </a:ln>
+        </p:spPr>
+      </p:pic>
+      <p:sp>
+        <p:nvSpPr>
+          <p:cNvPr id="133" name="Google Shape;133;p13"/>
+          <p:cNvSpPr txBox="1"/>
+          <p:nvPr/>
+        </p:nvSpPr>
+        <p:spPr>
+          <a:xfrm>
+            <a:off x="5216192" y="3464718"/>
+            <a:ext cx="855888" cy="171450"/>
+          </a:xfrm>
+          <a:prstGeom prst="rect">
+            <a:avLst/>
+          </a:prstGeom>
+          <a:noFill/>
+          <a:ln>
+            <a:noFill/>
+          </a:ln>
+        </p:spPr>
+        <p:txBody>
+          <a:bodyPr spcFirstLastPara="1" wrap="square" lIns="0" tIns="0" rIns="0" bIns="0" anchor="t" anchorCtr="0">
+            <a:spAutoFit/>
+          </a:bodyPr>
+          <a:lstStyle/>
+          <a:p>
+            <a:pPr marL="0" marR="0" lvl="0" indent="0" algn="ctr" rtl="0">
+              <a:spcBef>
+                <a:spcPts val="0"/>
+              </a:spcBef>
+              <a:spcAft>
+                <a:spcPts val="0"/>
+              </a:spcAft>
+              <a:buNone/>
+            </a:pPr>
+            <a:r>
+              <a:rPr lang="en-US" sz="1050" b="1" i="0" u="none" strike="noStrike" cap="none">
+                <a:solidFill>
+                  <a:srgbClr val="FFFFFF"/>
+                </a:solidFill>
+                <a:latin typeface="Malgun Gothic"/>
+                <a:ea typeface="Malgun Gothic"/>
+                <a:cs typeface="Malgun Gothic"/>
+                <a:sym typeface="Malgun Gothic"/>
+              </a:rPr>
+              <a:t>1차 전방 접근</a:t>
+            </a:r>
+            <a:endParaRPr/>
+          </a:p>
+        </p:txBody>
+      </p:sp>
+      <p:sp>
+        <p:nvSpPr>
+          <p:cNvPr id="134" name="Google Shape;134;p13"/>
+          <p:cNvSpPr txBox="1"/>
+          <p:nvPr/>
+        </p:nvSpPr>
+        <p:spPr>
+          <a:xfrm>
+            <a:off x="4634560" y="3674268"/>
+            <a:ext cx="2019151" cy="319980"/>
+          </a:xfrm>
+          <a:prstGeom prst="rect">
+            <a:avLst/>
+          </a:prstGeom>
+          <a:noFill/>
+          <a:ln>
+            <a:noFill/>
+          </a:ln>
+        </p:spPr>
+        <p:txBody>
+          <a:bodyPr spcFirstLastPara="1" wrap="square" lIns="0" tIns="0" rIns="0" bIns="0" anchor="t" anchorCtr="0">
+            <a:spAutoFit/>
+          </a:bodyPr>
+          <a:lstStyle/>
+          <a:p>
+            <a:pPr marL="0" marR="0" lvl="0" indent="0" algn="ctr" rtl="0">
+              <a:lnSpc>
+                <a:spcPct val="140000"/>
+              </a:lnSpc>
+              <a:spcBef>
+                <a:spcPts val="0"/>
+              </a:spcBef>
+              <a:spcAft>
+                <a:spcPts val="0"/>
+              </a:spcAft>
+              <a:buNone/>
+            </a:pPr>
+            <a:r>
+              <a:rPr lang="en-US" sz="900" b="0" i="0" u="none" strike="noStrike" cap="none">
+                <a:solidFill>
+                  <a:srgbClr val="94A3B8"/>
+                </a:solidFill>
+                <a:latin typeface="Malgun Gothic"/>
+                <a:ea typeface="Malgun Gothic"/>
+                <a:cs typeface="Malgun Gothic"/>
+                <a:sym typeface="Malgun Gothic"/>
+              </a:rPr>
+              <a:t>라이다를 이용해 가판대와 정확히 50cm 거리가 될 때까지 직진</a:t>
+            </a:r>
+            <a:endParaRPr/>
+          </a:p>
+        </p:txBody>
+      </p:sp>
+      <p:pic>
+        <p:nvPicPr>
+          <p:cNvPr id="135" name="Google Shape;135;p13" descr="image.png"/>
+          <p:cNvPicPr preferRelativeResize="0"/>
+          <p:nvPr/>
+        </p:nvPicPr>
+        <p:blipFill rotWithShape="1">
+          <a:blip r:embed="rId31">
+            <a:alphaModFix/>
+          </a:blip>
+          <a:srcRect/>
+          <a:stretch/>
+        </p:blipFill>
+        <p:spPr>
+          <a:xfrm>
+            <a:off x="7762630" y="3255168"/>
+            <a:ext cx="525214" cy="152400"/>
+          </a:xfrm>
+          <a:prstGeom prst="rect">
+            <a:avLst/>
+          </a:prstGeom>
+          <a:noFill/>
+          <a:ln>
+            <a:noFill/>
+          </a:ln>
+        </p:spPr>
+      </p:pic>
+      <p:sp>
+        <p:nvSpPr>
+          <p:cNvPr id="136" name="Google Shape;136;p13"/>
+          <p:cNvSpPr txBox="1"/>
+          <p:nvPr/>
+        </p:nvSpPr>
+        <p:spPr>
+          <a:xfrm>
+            <a:off x="7725747" y="3464718"/>
+            <a:ext cx="598981" cy="171450"/>
+          </a:xfrm>
+          <a:prstGeom prst="rect">
+            <a:avLst/>
+          </a:prstGeom>
+          <a:noFill/>
+          <a:ln>
+            <a:noFill/>
+          </a:ln>
+        </p:spPr>
+        <p:txBody>
+          <a:bodyPr spcFirstLastPara="1" wrap="square" lIns="0" tIns="0" rIns="0" bIns="0" anchor="t" anchorCtr="0">
+            <a:spAutoFit/>
+          </a:bodyPr>
+          <a:lstStyle/>
+          <a:p>
+            <a:pPr marL="0" marR="0" lvl="0" indent="0" algn="ctr" rtl="0">
+              <a:spcBef>
+                <a:spcPts val="0"/>
+              </a:spcBef>
+              <a:spcAft>
+                <a:spcPts val="0"/>
+              </a:spcAft>
+              <a:buNone/>
+            </a:pPr>
+            <a:r>
+              <a:rPr lang="en-US" sz="1050" b="1" i="0" u="none" strike="noStrike" cap="none">
+                <a:solidFill>
+                  <a:srgbClr val="FFFFFF"/>
+                </a:solidFill>
+                <a:latin typeface="Malgun Gothic"/>
+                <a:ea typeface="Malgun Gothic"/>
+                <a:cs typeface="Malgun Gothic"/>
+                <a:sym typeface="Malgun Gothic"/>
+              </a:rPr>
+              <a:t>자세 정렬</a:t>
+            </a:r>
+            <a:endParaRPr/>
+          </a:p>
+        </p:txBody>
+      </p:sp>
+      <p:sp>
+        <p:nvSpPr>
+          <p:cNvPr id="137" name="Google Shape;137;p13"/>
+          <p:cNvSpPr txBox="1"/>
+          <p:nvPr/>
+        </p:nvSpPr>
+        <p:spPr>
+          <a:xfrm>
+            <a:off x="7015662" y="3674268"/>
+            <a:ext cx="2019151" cy="319980"/>
+          </a:xfrm>
+          <a:prstGeom prst="rect">
+            <a:avLst/>
+          </a:prstGeom>
+          <a:noFill/>
+          <a:ln>
+            <a:noFill/>
+          </a:ln>
+        </p:spPr>
+        <p:txBody>
+          <a:bodyPr spcFirstLastPara="1" wrap="square" lIns="0" tIns="0" rIns="0" bIns="0" anchor="t" anchorCtr="0">
+            <a:spAutoFit/>
+          </a:bodyPr>
+          <a:lstStyle/>
+          <a:p>
+            <a:pPr marL="0" marR="0" lvl="0" indent="0" algn="ctr" rtl="0">
+              <a:lnSpc>
+                <a:spcPct val="140000"/>
+              </a:lnSpc>
+              <a:spcBef>
+                <a:spcPts val="0"/>
+              </a:spcBef>
+              <a:spcAft>
+                <a:spcPts val="0"/>
+              </a:spcAft>
+              <a:buNone/>
+            </a:pPr>
+            <a:r>
+              <a:rPr lang="en-US" sz="900" b="0" i="0" u="none" strike="noStrike" cap="none">
+                <a:solidFill>
+                  <a:srgbClr val="94A3B8"/>
+                </a:solidFill>
+                <a:latin typeface="Malgun Gothic"/>
+                <a:ea typeface="Malgun Gothic"/>
+                <a:cs typeface="Malgun Gothic"/>
+                <a:sym typeface="Malgun Gothic"/>
+              </a:rPr>
+              <a:t>가판대와 기체가 평행이 되도록 정렬하고 '최초 방향' 기록</a:t>
+            </a:r>
+            <a:endParaRPr/>
+          </a:p>
+        </p:txBody>
+      </p:sp>
+      <p:pic>
+        <p:nvPicPr>
+          <p:cNvPr id="138" name="Google Shape;138;p13" descr="image.png"/>
+          <p:cNvPicPr preferRelativeResize="0"/>
+          <p:nvPr/>
+        </p:nvPicPr>
+        <p:blipFill rotWithShape="1">
+          <a:blip r:embed="rId32">
+            <a:alphaModFix/>
+          </a:blip>
+          <a:srcRect/>
+          <a:stretch/>
+        </p:blipFill>
+        <p:spPr>
+          <a:xfrm>
+            <a:off x="10143731" y="3255168"/>
+            <a:ext cx="525214" cy="152400"/>
+          </a:xfrm>
+          <a:prstGeom prst="rect">
+            <a:avLst/>
+          </a:prstGeom>
+          <a:noFill/>
+          <a:ln>
+            <a:noFill/>
+          </a:ln>
+        </p:spPr>
+      </p:pic>
+      <p:sp>
+        <p:nvSpPr>
+          <p:cNvPr id="139" name="Google Shape;139;p13"/>
+          <p:cNvSpPr txBox="1"/>
+          <p:nvPr/>
+        </p:nvSpPr>
+        <p:spPr>
+          <a:xfrm>
+            <a:off x="10036839" y="3464718"/>
+            <a:ext cx="738998" cy="171450"/>
+          </a:xfrm>
+          <a:prstGeom prst="rect">
+            <a:avLst/>
+          </a:prstGeom>
+          <a:noFill/>
+          <a:ln>
+            <a:noFill/>
+          </a:ln>
+        </p:spPr>
+        <p:txBody>
+          <a:bodyPr spcFirstLastPara="1" wrap="square" lIns="0" tIns="0" rIns="0" bIns="0" anchor="t" anchorCtr="0">
+            <a:spAutoFit/>
+          </a:bodyPr>
+          <a:lstStyle/>
+          <a:p>
+            <a:pPr marL="0" marR="0" lvl="0" indent="0" algn="ctr" rtl="0">
+              <a:spcBef>
+                <a:spcPts val="0"/>
+              </a:spcBef>
+              <a:spcAft>
+                <a:spcPts val="0"/>
+              </a:spcAft>
+              <a:buNone/>
+            </a:pPr>
+            <a:r>
+              <a:rPr lang="en-US" sz="1050" b="1" i="0" u="none" strike="noStrike" cap="none">
+                <a:solidFill>
+                  <a:srgbClr val="FFFFFF"/>
+                </a:solidFill>
+                <a:latin typeface="Malgun Gothic"/>
+                <a:ea typeface="Malgun Gothic"/>
+                <a:cs typeface="Malgun Gothic"/>
+                <a:sym typeface="Malgun Gothic"/>
+              </a:rPr>
+              <a:t>관성 안정화</a:t>
+            </a:r>
+            <a:endParaRPr/>
+          </a:p>
+        </p:txBody>
+      </p:sp>
+      <p:sp>
+        <p:nvSpPr>
+          <p:cNvPr id="140" name="Google Shape;140;p13"/>
+          <p:cNvSpPr txBox="1"/>
+          <p:nvPr/>
+        </p:nvSpPr>
+        <p:spPr>
+          <a:xfrm>
+            <a:off x="9396763" y="3674268"/>
+            <a:ext cx="2019151" cy="319980"/>
+          </a:xfrm>
+          <a:prstGeom prst="rect">
+            <a:avLst/>
+          </a:prstGeom>
+          <a:noFill/>
+          <a:ln>
+            <a:noFill/>
+          </a:ln>
+        </p:spPr>
+        <p:txBody>
+          <a:bodyPr spcFirstLastPara="1" wrap="square" lIns="0" tIns="0" rIns="0" bIns="0" anchor="t" anchorCtr="0">
+            <a:spAutoFit/>
+          </a:bodyPr>
+          <a:lstStyle/>
+          <a:p>
+            <a:pPr marL="0" marR="0" lvl="0" indent="0" algn="ctr" rtl="0">
+              <a:lnSpc>
+                <a:spcPct val="140000"/>
+              </a:lnSpc>
+              <a:spcBef>
+                <a:spcPts val="0"/>
+              </a:spcBef>
+              <a:spcAft>
+                <a:spcPts val="0"/>
+              </a:spcAft>
+              <a:buNone/>
+            </a:pPr>
+            <a:r>
+              <a:rPr lang="en-US" sz="900" b="0" i="0" u="none" strike="noStrike" cap="none">
+                <a:solidFill>
+                  <a:srgbClr val="94A3B8"/>
+                </a:solidFill>
+                <a:latin typeface="Malgun Gothic"/>
+                <a:ea typeface="Malgun Gothic"/>
+                <a:cs typeface="Malgun Gothic"/>
+                <a:sym typeface="Malgun Gothic"/>
+              </a:rPr>
+              <a:t>모션 블러 제거를 위해 회전 직후 기체를 1.5초간 완벽히 정지</a:t>
+            </a:r>
+            <a:endParaRPr/>
+          </a:p>
+        </p:txBody>
+      </p:sp>
+      <p:pic>
+        <p:nvPicPr>
+          <p:cNvPr id="141" name="Google Shape;141;p13" descr="image.png"/>
+          <p:cNvPicPr preferRelativeResize="0"/>
+          <p:nvPr/>
+        </p:nvPicPr>
+        <p:blipFill rotWithShape="1">
+          <a:blip r:embed="rId33">
+            <a:alphaModFix/>
+          </a:blip>
+          <a:srcRect/>
+          <a:stretch/>
+        </p:blipFill>
+        <p:spPr>
+          <a:xfrm>
+            <a:off x="6572154" y="5232499"/>
+            <a:ext cx="525214" cy="152400"/>
+          </a:xfrm>
+          <a:prstGeom prst="rect">
+            <a:avLst/>
+          </a:prstGeom>
+          <a:noFill/>
+          <a:ln>
+            <a:noFill/>
+          </a:ln>
+        </p:spPr>
+      </p:pic>
+      <p:sp>
+        <p:nvSpPr>
+          <p:cNvPr id="142" name="Google Shape;142;p13"/>
+          <p:cNvSpPr txBox="1"/>
+          <p:nvPr/>
+        </p:nvSpPr>
+        <p:spPr>
+          <a:xfrm>
+            <a:off x="6305714" y="5442049"/>
+            <a:ext cx="1057944" cy="171450"/>
+          </a:xfrm>
+          <a:prstGeom prst="rect">
+            <a:avLst/>
+          </a:prstGeom>
+          <a:noFill/>
+          <a:ln>
+            <a:noFill/>
+          </a:ln>
+        </p:spPr>
+        <p:txBody>
+          <a:bodyPr spcFirstLastPara="1" wrap="square" lIns="0" tIns="0" rIns="0" bIns="0" anchor="t" anchorCtr="0">
+            <a:spAutoFit/>
+          </a:bodyPr>
+          <a:lstStyle/>
+          <a:p>
+            <a:pPr marL="0" marR="0" lvl="0" indent="0" algn="ctr" rtl="0">
+              <a:spcBef>
+                <a:spcPts val="0"/>
+              </a:spcBef>
+              <a:spcAft>
+                <a:spcPts val="0"/>
+              </a:spcAft>
+              <a:buNone/>
+            </a:pPr>
+            <a:r>
+              <a:rPr lang="en-US" sz="1050" b="1" i="0" u="none" strike="noStrike" cap="none">
+                <a:solidFill>
+                  <a:srgbClr val="FFFFFF"/>
+                </a:solidFill>
+                <a:latin typeface="Malgun Gothic"/>
+                <a:ea typeface="Malgun Gothic"/>
+                <a:cs typeface="Malgun Gothic"/>
+                <a:sym typeface="Malgun Gothic"/>
+              </a:rPr>
+              <a:t>시야 탐색 &amp; 정렬</a:t>
+            </a:r>
+            <a:endParaRPr/>
+          </a:p>
+        </p:txBody>
+      </p:sp>
+      <p:sp>
+        <p:nvSpPr>
+          <p:cNvPr id="143" name="Google Shape;143;p13"/>
+          <p:cNvSpPr txBox="1"/>
+          <p:nvPr/>
+        </p:nvSpPr>
+        <p:spPr>
+          <a:xfrm>
+            <a:off x="5825185" y="5651599"/>
+            <a:ext cx="2019151" cy="319980"/>
+          </a:xfrm>
+          <a:prstGeom prst="rect">
+            <a:avLst/>
+          </a:prstGeom>
+          <a:noFill/>
+          <a:ln>
+            <a:noFill/>
+          </a:ln>
+        </p:spPr>
+        <p:txBody>
+          <a:bodyPr spcFirstLastPara="1" wrap="square" lIns="0" tIns="0" rIns="0" bIns="0" anchor="t" anchorCtr="0">
+            <a:spAutoFit/>
+          </a:bodyPr>
+          <a:lstStyle/>
+          <a:p>
+            <a:pPr marL="0" marR="0" lvl="0" indent="0" algn="ctr" rtl="0">
+              <a:lnSpc>
+                <a:spcPct val="140000"/>
+              </a:lnSpc>
+              <a:spcBef>
+                <a:spcPts val="0"/>
+              </a:spcBef>
+              <a:spcAft>
+                <a:spcPts val="0"/>
+              </a:spcAft>
+              <a:buNone/>
+            </a:pPr>
+            <a:r>
+              <a:rPr lang="en-US" sz="900" b="0" i="0" u="none" strike="noStrike" cap="none">
+                <a:solidFill>
+                  <a:srgbClr val="94A3B8"/>
+                </a:solidFill>
+                <a:latin typeface="Malgun Gothic"/>
+                <a:ea typeface="Malgun Gothic"/>
+                <a:cs typeface="Malgun Gothic"/>
+                <a:sym typeface="Malgun Gothic"/>
+              </a:rPr>
+              <a:t>메모리 방향 기준 게걸음(Crab Walk)으로 오차 8cm 이내 중앙 정렬</a:t>
+            </a:r>
+            <a:endParaRPr/>
+          </a:p>
+        </p:txBody>
+      </p:sp>
+      <p:pic>
+        <p:nvPicPr>
+          <p:cNvPr id="144" name="Google Shape;144;p13" descr="image.png"/>
+          <p:cNvPicPr preferRelativeResize="0"/>
+          <p:nvPr/>
+        </p:nvPicPr>
+        <p:blipFill rotWithShape="1">
+          <a:blip r:embed="rId34">
+            <a:alphaModFix/>
+          </a:blip>
+          <a:srcRect/>
+          <a:stretch/>
+        </p:blipFill>
+        <p:spPr>
+          <a:xfrm>
+            <a:off x="8953255" y="5232499"/>
+            <a:ext cx="525214" cy="152400"/>
+          </a:xfrm>
+          <a:prstGeom prst="rect">
+            <a:avLst/>
+          </a:prstGeom>
+          <a:noFill/>
+          <a:ln>
+            <a:noFill/>
+          </a:ln>
+        </p:spPr>
+      </p:pic>
+      <p:sp>
+        <p:nvSpPr>
+          <p:cNvPr id="145" name="Google Shape;145;p13"/>
+          <p:cNvSpPr txBox="1"/>
+          <p:nvPr/>
+        </p:nvSpPr>
+        <p:spPr>
+          <a:xfrm>
+            <a:off x="8756824" y="5442049"/>
+            <a:ext cx="917927" cy="171450"/>
+          </a:xfrm>
+          <a:prstGeom prst="rect">
+            <a:avLst/>
+          </a:prstGeom>
+          <a:noFill/>
+          <a:ln>
+            <a:noFill/>
+          </a:ln>
+        </p:spPr>
+        <p:txBody>
+          <a:bodyPr spcFirstLastPara="1" wrap="square" lIns="0" tIns="0" rIns="0" bIns="0" anchor="t" anchorCtr="0">
+            <a:spAutoFit/>
+          </a:bodyPr>
+          <a:lstStyle/>
+          <a:p>
+            <a:pPr marL="0" marR="0" lvl="0" indent="0" algn="ctr" rtl="0">
+              <a:spcBef>
+                <a:spcPts val="0"/>
+              </a:spcBef>
+              <a:spcAft>
+                <a:spcPts val="0"/>
+              </a:spcAft>
+              <a:buNone/>
+            </a:pPr>
+            <a:r>
+              <a:rPr lang="en-US" sz="1050" b="1" i="0" u="none" strike="noStrike" cap="none">
+                <a:solidFill>
+                  <a:srgbClr val="FFFFFF"/>
+                </a:solidFill>
+                <a:latin typeface="Malgun Gothic"/>
+                <a:ea typeface="Malgun Gothic"/>
+                <a:cs typeface="Malgun Gothic"/>
+                <a:sym typeface="Malgun Gothic"/>
+              </a:rPr>
+              <a:t>최종 밀착 도킹</a:t>
+            </a:r>
+            <a:endParaRPr/>
+          </a:p>
+        </p:txBody>
+      </p:sp>
+      <p:sp>
+        <p:nvSpPr>
+          <p:cNvPr id="146" name="Google Shape;146;p13"/>
+          <p:cNvSpPr txBox="1"/>
+          <p:nvPr/>
+        </p:nvSpPr>
+        <p:spPr>
+          <a:xfrm>
+            <a:off x="8206287" y="5651599"/>
+            <a:ext cx="2019151" cy="319980"/>
+          </a:xfrm>
+          <a:prstGeom prst="rect">
+            <a:avLst/>
+          </a:prstGeom>
+          <a:noFill/>
+          <a:ln>
+            <a:noFill/>
+          </a:ln>
+        </p:spPr>
+        <p:txBody>
+          <a:bodyPr spcFirstLastPara="1" wrap="square" lIns="0" tIns="0" rIns="0" bIns="0" anchor="t" anchorCtr="0">
+            <a:spAutoFit/>
+          </a:bodyPr>
+          <a:lstStyle/>
+          <a:p>
+            <a:pPr marL="0" marR="0" lvl="0" indent="0" algn="ctr" rtl="0">
+              <a:lnSpc>
+                <a:spcPct val="140000"/>
+              </a:lnSpc>
+              <a:spcBef>
+                <a:spcPts val="0"/>
+              </a:spcBef>
+              <a:spcAft>
+                <a:spcPts val="0"/>
+              </a:spcAft>
+              <a:buNone/>
+            </a:pPr>
+            <a:r>
+              <a:rPr lang="en-US" sz="900" b="0" i="0" u="none" strike="noStrike" cap="none">
+                <a:solidFill>
+                  <a:srgbClr val="94A3B8"/>
+                </a:solidFill>
+                <a:latin typeface="Malgun Gothic"/>
+                <a:ea typeface="Malgun Gothic"/>
+                <a:cs typeface="Malgun Gothic"/>
+                <a:sym typeface="Malgun Gothic"/>
+              </a:rPr>
+              <a:t>정밀 보정 요청 후 2차 게걸음 및 22cm 전진으로 도킹 완료</a:t>
+            </a:r>
+            <a:endParaRPr/>
+          </a:p>
+        </p:txBody>
+      </p:sp>
+      <p:pic>
+        <p:nvPicPr>
+          <p:cNvPr id="147" name="Google Shape;147;p13" descr="image.png"/>
+          <p:cNvPicPr preferRelativeResize="0"/>
+          <p:nvPr/>
+        </p:nvPicPr>
+        <p:blipFill rotWithShape="1">
+          <a:blip r:embed="rId35">
+            <a:alphaModFix/>
+          </a:blip>
+          <a:srcRect/>
+          <a:stretch/>
+        </p:blipFill>
+        <p:spPr>
+          <a:xfrm>
+            <a:off x="4644085" y="2388393"/>
+            <a:ext cx="2000101" cy="742950"/>
+          </a:xfrm>
+          <a:prstGeom prst="rect">
+            <a:avLst/>
+          </a:prstGeom>
+          <a:noFill/>
+          <a:ln>
+            <a:noFill/>
+          </a:ln>
+        </p:spPr>
+      </p:pic>
+      <p:pic>
+        <p:nvPicPr>
+          <p:cNvPr id="148" name="Google Shape;148;p13" descr="image.png"/>
+          <p:cNvPicPr preferRelativeResize="0"/>
+          <p:nvPr/>
+        </p:nvPicPr>
+        <p:blipFill rotWithShape="1">
+          <a:blip r:embed="rId36">
+            <a:alphaModFix/>
+          </a:blip>
+          <a:srcRect/>
+          <a:stretch/>
+        </p:blipFill>
+        <p:spPr>
+          <a:xfrm>
+            <a:off x="7025187" y="2388393"/>
+            <a:ext cx="2000101" cy="742950"/>
+          </a:xfrm>
+          <a:prstGeom prst="rect">
+            <a:avLst/>
+          </a:prstGeom>
+          <a:noFill/>
+          <a:ln>
+            <a:noFill/>
+          </a:ln>
+        </p:spPr>
+      </p:pic>
+      <p:pic>
+        <p:nvPicPr>
+          <p:cNvPr id="149" name="Google Shape;149;p13" descr="image.png"/>
+          <p:cNvPicPr preferRelativeResize="0"/>
+          <p:nvPr/>
+        </p:nvPicPr>
+        <p:blipFill rotWithShape="1">
+          <a:blip r:embed="rId37">
+            <a:alphaModFix/>
+          </a:blip>
+          <a:srcRect/>
+          <a:stretch/>
+        </p:blipFill>
+        <p:spPr>
+          <a:xfrm>
+            <a:off x="9406288" y="2388393"/>
+            <a:ext cx="2000101" cy="742950"/>
+          </a:xfrm>
+          <a:prstGeom prst="rect">
+            <a:avLst/>
+          </a:prstGeom>
+          <a:noFill/>
+          <a:ln>
+            <a:noFill/>
+          </a:ln>
+        </p:spPr>
+      </p:pic>
+      <p:pic>
+        <p:nvPicPr>
+          <p:cNvPr id="150" name="Google Shape;150;p13" descr="image.png"/>
+          <p:cNvPicPr preferRelativeResize="0"/>
+          <p:nvPr/>
+        </p:nvPicPr>
+        <p:blipFill rotWithShape="1">
+          <a:blip r:embed="rId38">
+            <a:alphaModFix/>
+          </a:blip>
+          <a:srcRect/>
+          <a:stretch/>
+        </p:blipFill>
+        <p:spPr>
+          <a:xfrm>
+            <a:off x="5834710" y="4365724"/>
+            <a:ext cx="2000101" cy="742950"/>
+          </a:xfrm>
+          <a:prstGeom prst="rect">
+            <a:avLst/>
+          </a:prstGeom>
+          <a:noFill/>
+          <a:ln>
+            <a:noFill/>
+          </a:ln>
+        </p:spPr>
+      </p:pic>
+      <p:pic>
+        <p:nvPicPr>
+          <p:cNvPr id="151" name="Google Shape;151;p13" descr="image.png"/>
+          <p:cNvPicPr preferRelativeResize="0"/>
+          <p:nvPr/>
+        </p:nvPicPr>
+        <p:blipFill rotWithShape="1">
+          <a:blip r:embed="rId39">
+            <a:alphaModFix/>
+          </a:blip>
+          <a:srcRect/>
+          <a:stretch/>
+        </p:blipFill>
+        <p:spPr>
+          <a:xfrm>
+            <a:off x="8215812" y="4365724"/>
+            <a:ext cx="2000101" cy="742950"/>
+          </a:xfrm>
+          <a:prstGeom prst="rect">
+            <a:avLst/>
+          </a:prstGeom>
+          <a:noFill/>
+          <a:ln>
+            <a:noFill/>
+          </a:ln>
+        </p:spPr>
+      </p:pic>
+      <p:sp>
+        <p:nvSpPr>
+          <p:cNvPr id="152" name="Google Shape;152;p13"/>
           <p:cNvSpPr/>
           <p:nvPr/>
         </p:nvSpPr>
         <p:spPr>
           <a:xfrm>
             <a:off x="0" y="0"/>
-            <a:ext cx="60960" cy="6858000"/>
+            <a:ext cx="57150" cy="6858000"/>
           </a:xfrm>
           <a:prstGeom prst="rect">
             <a:avLst/>
@@ -13188,385 +13548,42 @@
           <a:solidFill>
             <a:srgbClr val="00C8FF"/>
           </a:solidFill>
-          <a:ln/>
-        </p:spPr>
-      </p:sp>
-      <p:sp>
-        <p:nvSpPr>
-          <p:cNvPr id="25" name="Shape 1"/>
-          <p:cNvSpPr/>
-          <p:nvPr/>
-        </p:nvSpPr>
-        <p:spPr>
-          <a:xfrm>
-            <a:off x="0" y="0"/>
-            <a:ext cx="12192000" cy="48768"/>
-          </a:xfrm>
-          <a:prstGeom prst="rect">
-            <a:avLst/>
-          </a:prstGeom>
-          <a:solidFill>
-            <a:srgbClr val="0066CC"/>
-          </a:solidFill>
-          <a:ln/>
-        </p:spPr>
-      </p:sp>
-      <p:sp>
-        <p:nvSpPr>
-          <p:cNvPr id="26" name="Shape 4"/>
-          <p:cNvSpPr/>
-          <p:nvPr/>
-        </p:nvSpPr>
-        <p:spPr>
-          <a:xfrm>
-            <a:off x="1828800" y="609600"/>
-            <a:ext cx="36576" cy="36576"/>
-          </a:xfrm>
-          <a:prstGeom prst="ellipse">
-            <a:avLst/>
-          </a:prstGeom>
-          <a:solidFill>
-            <a:srgbClr val="1A2744"/>
-          </a:solidFill>
-          <a:ln/>
-        </p:spPr>
-      </p:sp>
-      <p:sp>
-        <p:nvSpPr>
-          <p:cNvPr id="27" name="Shape 10"/>
-          <p:cNvSpPr/>
-          <p:nvPr/>
-        </p:nvSpPr>
-        <p:spPr>
-          <a:xfrm>
-            <a:off x="3291840" y="609600"/>
-            <a:ext cx="36576" cy="36576"/>
-          </a:xfrm>
-          <a:prstGeom prst="ellipse">
-            <a:avLst/>
-          </a:prstGeom>
-          <a:solidFill>
-            <a:srgbClr val="1A2744"/>
-          </a:solidFill>
-          <a:ln/>
-        </p:spPr>
-      </p:sp>
-      <p:sp>
-        <p:nvSpPr>
-          <p:cNvPr id="28" name="Shape 16"/>
-          <p:cNvSpPr/>
-          <p:nvPr/>
-        </p:nvSpPr>
-        <p:spPr>
-          <a:xfrm>
-            <a:off x="4754880" y="609600"/>
-            <a:ext cx="36576" cy="36576"/>
-          </a:xfrm>
-          <a:prstGeom prst="ellipse">
-            <a:avLst/>
-          </a:prstGeom>
-          <a:solidFill>
-            <a:srgbClr val="1A2744"/>
-          </a:solidFill>
-          <a:ln/>
-        </p:spPr>
-      </p:sp>
-      <p:sp>
-        <p:nvSpPr>
-          <p:cNvPr id="29" name="Shape 22"/>
-          <p:cNvSpPr/>
-          <p:nvPr/>
-        </p:nvSpPr>
-        <p:spPr>
-          <a:xfrm>
-            <a:off x="6217920" y="609600"/>
-            <a:ext cx="36576" cy="36576"/>
-          </a:xfrm>
-          <a:prstGeom prst="ellipse">
-            <a:avLst/>
-          </a:prstGeom>
-          <a:solidFill>
-            <a:srgbClr val="1A2744"/>
-          </a:solidFill>
-          <a:ln/>
-        </p:spPr>
-      </p:sp>
-      <p:sp>
-        <p:nvSpPr>
-          <p:cNvPr id="30" name="Shape 28"/>
-          <p:cNvSpPr/>
-          <p:nvPr/>
-        </p:nvSpPr>
-        <p:spPr>
-          <a:xfrm>
-            <a:off x="7680960" y="609600"/>
-            <a:ext cx="36576" cy="36576"/>
-          </a:xfrm>
-          <a:prstGeom prst="ellipse">
-            <a:avLst/>
-          </a:prstGeom>
-          <a:solidFill>
-            <a:srgbClr val="1A2744"/>
-          </a:solidFill>
-          <a:ln/>
-        </p:spPr>
-      </p:sp>
-      <p:sp>
-        <p:nvSpPr>
-          <p:cNvPr id="31" name="Shape 34"/>
-          <p:cNvSpPr/>
-          <p:nvPr/>
-        </p:nvSpPr>
-        <p:spPr>
-          <a:xfrm>
-            <a:off x="9144000" y="609600"/>
-            <a:ext cx="36576" cy="36576"/>
-          </a:xfrm>
-          <a:prstGeom prst="ellipse">
-            <a:avLst/>
-          </a:prstGeom>
-          <a:solidFill>
-            <a:srgbClr val="1A2744"/>
-          </a:solidFill>
-          <a:ln/>
-        </p:spPr>
-      </p:sp>
-      <p:sp>
-        <p:nvSpPr>
-          <p:cNvPr id="32" name="Shape 40"/>
-          <p:cNvSpPr/>
-          <p:nvPr/>
-        </p:nvSpPr>
-        <p:spPr>
-          <a:xfrm>
-            <a:off x="10607040" y="609600"/>
-            <a:ext cx="36576" cy="36576"/>
-          </a:xfrm>
-          <a:prstGeom prst="ellipse">
-            <a:avLst/>
-          </a:prstGeom>
-          <a:solidFill>
-            <a:srgbClr val="1A2744"/>
-          </a:solidFill>
-          <a:ln/>
-        </p:spPr>
-      </p:sp>
-      <p:sp>
-        <p:nvSpPr>
-          <p:cNvPr id="33" name="Shape 46"/>
-          <p:cNvSpPr/>
-          <p:nvPr/>
-        </p:nvSpPr>
-        <p:spPr>
-          <a:xfrm>
-            <a:off x="12070080" y="609600"/>
-            <a:ext cx="36576" cy="36576"/>
-          </a:xfrm>
-          <a:prstGeom prst="ellipse">
-            <a:avLst/>
-          </a:prstGeom>
-          <a:solidFill>
-            <a:srgbClr val="1A2744"/>
-          </a:solidFill>
-          <a:ln/>
-        </p:spPr>
-      </p:sp>
-      <p:sp>
-        <p:nvSpPr>
-          <p:cNvPr id="34" name="Shape 52"/>
-          <p:cNvSpPr/>
-          <p:nvPr/>
-        </p:nvSpPr>
-        <p:spPr>
-          <a:xfrm>
-            <a:off x="375920" y="365760"/>
-            <a:ext cx="11460480" cy="975360"/>
-          </a:xfrm>
-          <a:prstGeom prst="rect">
-            <a:avLst/>
-          </a:prstGeom>
-          <a:solidFill>
-            <a:srgbClr val="1E293B"/>
-          </a:solidFill>
-          <a:ln/>
-        </p:spPr>
-      </p:sp>
-      <p:sp>
-        <p:nvSpPr>
-          <p:cNvPr id="35" name="Shape 53"/>
-          <p:cNvSpPr/>
-          <p:nvPr/>
-        </p:nvSpPr>
-        <p:spPr>
-          <a:xfrm>
-            <a:off x="365760" y="365760"/>
-            <a:ext cx="85344" cy="975360"/>
-          </a:xfrm>
-          <a:prstGeom prst="rect">
-            <a:avLst/>
-          </a:prstGeom>
-          <a:solidFill>
-            <a:srgbClr val="00C8FF"/>
-          </a:solidFill>
-          <a:ln/>
-        </p:spPr>
-      </p:sp>
-      <p:sp>
-        <p:nvSpPr>
-          <p:cNvPr id="36" name="Text 54"/>
-          <p:cNvSpPr/>
-          <p:nvPr/>
-        </p:nvSpPr>
-        <p:spPr>
-          <a:xfrm>
-            <a:off x="670560" y="390144"/>
-            <a:ext cx="10363200" cy="304800"/>
-          </a:xfrm>
-          <a:prstGeom prst="rect">
-            <a:avLst/>
-          </a:prstGeom>
-          <a:noFill/>
-          <a:ln/>
+          <a:ln>
+            <a:noFill/>
+          </a:ln>
         </p:spPr>
         <p:txBody>
-          <a:bodyPr wrap="square" lIns="0" tIns="0" rIns="0" bIns="0" rtlCol="0" anchor="ctr"/>
+          <a:bodyPr spcFirstLastPara="1" wrap="square" lIns="91425" tIns="45700" rIns="91425" bIns="45700" anchor="ctr" anchorCtr="0">
+            <a:noAutofit/>
+          </a:bodyPr>
           <a:lstStyle/>
           <a:p>
-            <a:r>
-              <a:rPr lang="en-US" sz="1067" b="1" dirty="0">
-                <a:solidFill>
-                  <a:srgbClr val="00C8FF"/>
-                </a:solidFill>
-                <a:latin typeface="Malgun Gothic" pitchFamily="34" charset="0"/>
-                <a:ea typeface="Malgun Gothic" pitchFamily="34" charset="-122"/>
-                <a:cs typeface="Malgun Gothic" pitchFamily="34" charset="-120"/>
-              </a:rPr>
-              <a:t>SLIDE 3 — 콘텐츠</a:t>
-            </a:r>
-            <a:endParaRPr lang="en-US" sz="1067" dirty="0"/>
+            <a:pPr marL="0" marR="0" lvl="0" indent="0" algn="ctr" rtl="0">
+              <a:spcBef>
+                <a:spcPts val="0"/>
+              </a:spcBef>
+              <a:spcAft>
+                <a:spcPts val="0"/>
+              </a:spcAft>
+              <a:buNone/>
+            </a:pPr>
+            <a:endParaRPr sz="1800" b="0" i="0" u="none" strike="noStrike" cap="none">
+              <a:solidFill>
+                <a:schemeClr val="dk1"/>
+              </a:solidFill>
+              <a:latin typeface="Calibri"/>
+              <a:ea typeface="Calibri"/>
+              <a:cs typeface="Calibri"/>
+              <a:sym typeface="Calibri"/>
+            </a:endParaRPr>
           </a:p>
         </p:txBody>
       </p:sp>
-      <p:sp>
-        <p:nvSpPr>
-          <p:cNvPr id="37" name="Text 55"/>
-          <p:cNvSpPr/>
-          <p:nvPr/>
-        </p:nvSpPr>
-        <p:spPr>
-          <a:xfrm>
-            <a:off x="670560" y="694944"/>
-            <a:ext cx="10363200" cy="548640"/>
-          </a:xfrm>
-          <a:prstGeom prst="rect">
-            <a:avLst/>
-          </a:prstGeom>
-          <a:noFill/>
-          <a:ln/>
-        </p:spPr>
-        <p:txBody>
-          <a:bodyPr wrap="square" lIns="0" tIns="0" rIns="0" bIns="0" rtlCol="0" anchor="ctr"/>
-          <a:lstStyle/>
-          <a:p>
-            <a:endParaRPr lang="en-US" sz="2667" dirty="0"/>
-          </a:p>
-        </p:txBody>
-      </p:sp>
-      <p:sp>
-        <p:nvSpPr>
-          <p:cNvPr id="39" name="Text 55"/>
-          <p:cNvSpPr/>
-          <p:nvPr/>
-        </p:nvSpPr>
-        <p:spPr>
-          <a:xfrm>
-            <a:off x="638271" y="684276"/>
-            <a:ext cx="10363200" cy="548640"/>
-          </a:xfrm>
-          <a:prstGeom prst="rect">
-            <a:avLst/>
-          </a:prstGeom>
-          <a:noFill/>
-          <a:ln/>
-        </p:spPr>
-        <p:txBody>
-          <a:bodyPr wrap="square" lIns="0" tIns="0" rIns="0" bIns="0" rtlCol="0" anchor="ctr"/>
-          <a:lstStyle/>
-          <a:p>
-            <a:r>
-              <a:rPr lang="en-US" sz="2667" b="1" dirty="0">
-                <a:solidFill>
-                  <a:srgbClr val="FFFFFF"/>
-                </a:solidFill>
-                <a:latin typeface="Malgun Gothic" pitchFamily="34" charset="0"/>
-                <a:ea typeface="Malgun Gothic" pitchFamily="34" charset="-122"/>
-                <a:cs typeface="Malgun Gothic" pitchFamily="34" charset="-120"/>
-              </a:rPr>
-              <a:t>[</a:t>
-            </a:r>
-            <a:r>
-              <a:rPr lang="ko-KR" altLang="en-US" sz="2667" b="1" dirty="0">
-                <a:solidFill>
-                  <a:srgbClr val="FFFFFF"/>
-                </a:solidFill>
-                <a:latin typeface="Malgun Gothic" pitchFamily="34" charset="0"/>
-                <a:ea typeface="Malgun Gothic" pitchFamily="34" charset="-122"/>
-                <a:cs typeface="Malgun Gothic" pitchFamily="34" charset="-120"/>
-              </a:rPr>
-              <a:t>ＡＧＶ　픽업　모드　파이프라인</a:t>
-            </a:r>
-            <a:r>
-              <a:rPr lang="en-US" sz="2667" b="1" dirty="0">
-                <a:solidFill>
-                  <a:srgbClr val="FFFFFF"/>
-                </a:solidFill>
-                <a:latin typeface="Malgun Gothic" pitchFamily="34" charset="0"/>
-                <a:ea typeface="Malgun Gothic" pitchFamily="34" charset="-122"/>
-                <a:cs typeface="Malgun Gothic" pitchFamily="34" charset="-120"/>
-              </a:rPr>
-              <a:t>]</a:t>
-            </a:r>
-            <a:endParaRPr lang="en-US" sz="2667" dirty="0"/>
-          </a:p>
-        </p:txBody>
-      </p:sp>
-      <p:sp>
-        <p:nvSpPr>
-          <p:cNvPr id="40" name="Shape 2"/>
-          <p:cNvSpPr/>
-          <p:nvPr/>
-        </p:nvSpPr>
-        <p:spPr>
-          <a:xfrm>
-            <a:off x="0" y="6809232"/>
-            <a:ext cx="12192000" cy="48768"/>
-          </a:xfrm>
-          <a:prstGeom prst="rect">
-            <a:avLst/>
-          </a:prstGeom>
-          <a:solidFill>
-            <a:srgbClr val="0066CC"/>
-          </a:solidFill>
-          <a:ln/>
-        </p:spPr>
-      </p:sp>
     </p:spTree>
-    <p:extLst>
-      <p:ext uri="{BB962C8B-B14F-4D97-AF65-F5344CB8AC3E}">
-        <p14:creationId xmlns:p14="http://schemas.microsoft.com/office/powerpoint/2010/main" val="2486246852"/>
-      </p:ext>
-    </p:extLst>
   </p:cSld>
   <p:clrMapOvr>
     <a:masterClrMapping/>
   </p:clrMapOvr>
-  <p:timing>
-    <p:tnLst>
-      <p:par>
-        <p:cTn id="1" dur="indefinite" restart="never" nodeType="tmRoot"/>
-      </p:par>
-    </p:tnLst>
-  </p:timing>
 </p:sld>
 </file>
 
